--- a/public/lessons/year-6-maths/spring/week-18/write-and-interpret-ratio-notation/teaching-powerpoint-v1.pptx
+++ b/public/lessons/year-6-maths/spring/week-18/write-and-interpret-ratio-notation/teaching-powerpoint-v1.pptx
@@ -2,24 +2,24 @@
 <file path=ppt/presentation.xml><?xml version="1.0" encoding="utf-8"?>
 <p:presentation xmlns:p="http://schemas.openxmlformats.org/presentationml/2006/main">
   <p:sldMasterIdLst>
-    <p:sldMasterId xmlns:r="http://schemas.openxmlformats.org/officeDocument/2006/relationships" id="2147483648" r:id="Rc1cc83ac06594ec3"/>
+    <p:sldMasterId xmlns:r="http://schemas.openxmlformats.org/officeDocument/2006/relationships" id="2147483648" r:id="Rfee1c17bb79743bd"/>
   </p:sldMasterIdLst>
   <p:notesMasterIdLst>
-    <p:notesMasterId xmlns:r="http://schemas.openxmlformats.org/officeDocument/2006/relationships" r:id="R171b988693cc4ce9"/>
+    <p:notesMasterId xmlns:r="http://schemas.openxmlformats.org/officeDocument/2006/relationships" r:id="R53250015e5774dd2"/>
   </p:notesMasterIdLst>
   <p:sldIdLst>
-    <p:sldId xmlns:r="http://schemas.openxmlformats.org/officeDocument/2006/relationships" id="256" r:id="Rf8a3f75c15b84994"/>
-    <p:sldId xmlns:r="http://schemas.openxmlformats.org/officeDocument/2006/relationships" id="257" r:id="R0bfee1d4dbad4a63"/>
-    <p:sldId xmlns:r="http://schemas.openxmlformats.org/officeDocument/2006/relationships" id="258" r:id="R1143603caf954b96"/>
-    <p:sldId xmlns:r="http://schemas.openxmlformats.org/officeDocument/2006/relationships" id="259" r:id="R451ff0384d594ade"/>
-    <p:sldId xmlns:r="http://schemas.openxmlformats.org/officeDocument/2006/relationships" id="260" r:id="R163c5435fe27456e"/>
-    <p:sldId xmlns:r="http://schemas.openxmlformats.org/officeDocument/2006/relationships" id="261" r:id="Rb2e7513d73ea4a83"/>
-    <p:sldId xmlns:r="http://schemas.openxmlformats.org/officeDocument/2006/relationships" id="262" r:id="Re29449fb6b1a474e"/>
-    <p:sldId xmlns:r="http://schemas.openxmlformats.org/officeDocument/2006/relationships" id="263" r:id="R644fa13824274ca8"/>
-    <p:sldId xmlns:r="http://schemas.openxmlformats.org/officeDocument/2006/relationships" id="264" r:id="Rc1726d43e2cd4ae7"/>
-    <p:sldId xmlns:r="http://schemas.openxmlformats.org/officeDocument/2006/relationships" id="265" r:id="R449ec3657d304ab5"/>
-    <p:sldId xmlns:r="http://schemas.openxmlformats.org/officeDocument/2006/relationships" id="266" r:id="R752733bd8467472d"/>
-    <p:sldId xmlns:r="http://schemas.openxmlformats.org/officeDocument/2006/relationships" id="267" r:id="R643f85c1719c4c3e"/>
+    <p:sldId xmlns:r="http://schemas.openxmlformats.org/officeDocument/2006/relationships" id="256" r:id="R6090512a958c4609"/>
+    <p:sldId xmlns:r="http://schemas.openxmlformats.org/officeDocument/2006/relationships" id="257" r:id="R050faa90f26c4ba6"/>
+    <p:sldId xmlns:r="http://schemas.openxmlformats.org/officeDocument/2006/relationships" id="258" r:id="R7d529efce8554175"/>
+    <p:sldId xmlns:r="http://schemas.openxmlformats.org/officeDocument/2006/relationships" id="259" r:id="Rbe06853becb2418f"/>
+    <p:sldId xmlns:r="http://schemas.openxmlformats.org/officeDocument/2006/relationships" id="260" r:id="R7c3702f525b0481d"/>
+    <p:sldId xmlns:r="http://schemas.openxmlformats.org/officeDocument/2006/relationships" id="261" r:id="Rb6a7a407a0cf4147"/>
+    <p:sldId xmlns:r="http://schemas.openxmlformats.org/officeDocument/2006/relationships" id="262" r:id="R167a4ab533e74b9e"/>
+    <p:sldId xmlns:r="http://schemas.openxmlformats.org/officeDocument/2006/relationships" id="263" r:id="R9436faa15c534813"/>
+    <p:sldId xmlns:r="http://schemas.openxmlformats.org/officeDocument/2006/relationships" id="264" r:id="Rb40e7655f50b4f24"/>
+    <p:sldId xmlns:r="http://schemas.openxmlformats.org/officeDocument/2006/relationships" id="265" r:id="R12f5f14893f44c2c"/>
+    <p:sldId xmlns:r="http://schemas.openxmlformats.org/officeDocument/2006/relationships" id="266" r:id="R9a1e8ac462a544c1"/>
+    <p:sldId xmlns:r="http://schemas.openxmlformats.org/officeDocument/2006/relationships" id="267" r:id="Re8299434504849a8"/>
   </p:sldIdLst>
   <p:sldSz cx="12192000" cy="6858000"/>
   <p:notesSz cx="6858000" cy="9144000"/>
@@ -873,7 +873,7 @@
           <a:lstStyle xmlns:a="http://schemas.openxmlformats.org/drawingml/2006/main"/>
           <a:p xmlns:a="http://schemas.openxmlformats.org/drawingml/2006/main">
             <a:r>
-              <a:t>I do. Reveal the question, setup and each calculation stage one click at a time. Pupils watch before copying. Model answer: For every 5 of the first quantity, there are 2 of the second.</a:t>
+              <a:t>I do. Reveal the question, then reveal each mathematical change one click at a time. Point to the numbers and operation that changed before moving to the next line. Final answer: For every 5 of the first quantity, there are 2 of the second.</a:t>
             </a:r>
           </a:p>
         </p:txBody>
@@ -1291,7 +1291,7 @@
   </p:cSld>
   <p:clrMap bg1="lt1" tx1="dk1" bg2="lt2" tx2="dk2" accent1="accent1" accent2="accent2" accent3="accent3" accent4="accent4" accent5="accent5" accent6="accent6" hlink="hlink" folHlink="folHlink"/>
   <p:sldLayoutIdLst>
-    <p:sldLayoutId xmlns:r="http://schemas.openxmlformats.org/officeDocument/2006/relationships" id="2147483649" r:id="Rbc07649494d5467c"/>
+    <p:sldLayoutId xmlns:r="http://schemas.openxmlformats.org/officeDocument/2006/relationships" id="2147483649" r:id="R4e992ce26aab4970"/>
   </p:sldLayoutIdLst>
   <p:txStyles>
     <p:titleStyle>
@@ -1842,7 +1842,7 @@
           <p:cNvPr id="12" name="">
             <a:extLst xmlns:a="http://schemas.openxmlformats.org/drawingml/2006/main">
               <a:ext uri="{FF2B5EF4-FFF2-40B4-BE49-F238E27FC236}">
-                <a16:creationId xmlns:a16="http://schemas.microsoft.com/office/drawing/2014/main" id="{E52DA81C-43E7-4973-BD29-206A8CF9B897}"/>
+                <a16:creationId xmlns:a16="http://schemas.microsoft.com/office/drawing/2014/main" id="{479BF5FD-9EF8-438E-8671-C4FD046C9E05}"/>
               </a:ext>
             </a:extLst>
           </p:cNvPr>
@@ -1874,7 +1874,7 @@
           <p:cNvPr id="2" name="">
             <a:extLst xmlns:a="http://schemas.openxmlformats.org/drawingml/2006/main">
               <a:ext uri="{FF2B5EF4-FFF2-40B4-BE49-F238E27FC236}">
-                <a16:creationId xmlns:a16="http://schemas.microsoft.com/office/drawing/2014/main" id="{D87A1BE7-D5BA-4CEE-8CB1-2304E88213FA}"/>
+                <a16:creationId xmlns:a16="http://schemas.microsoft.com/office/drawing/2014/main" id="{0D680A91-C01F-4F47-93B3-726E475D69B8}"/>
               </a:ext>
             </a:extLst>
           </p:cNvPr>
@@ -1931,7 +1931,7 @@
           <p:cNvPr id="3" name="">
             <a:extLst xmlns:a="http://schemas.openxmlformats.org/drawingml/2006/main">
               <a:ext uri="{FF2B5EF4-FFF2-40B4-BE49-F238E27FC236}">
-                <a16:creationId xmlns:a16="http://schemas.microsoft.com/office/drawing/2014/main" id="{A0A14034-AF67-4668-8B0B-F85724396883}"/>
+                <a16:creationId xmlns:a16="http://schemas.microsoft.com/office/drawing/2014/main" id="{33AFF2B1-DF06-4659-A242-6E8FBBFE2C43}"/>
               </a:ext>
             </a:extLst>
           </p:cNvPr>
@@ -1965,7 +1965,7 @@
           <p:cNvPr id="4" name="">
             <a:extLst xmlns:a="http://schemas.openxmlformats.org/drawingml/2006/main">
               <a:ext uri="{FF2B5EF4-FFF2-40B4-BE49-F238E27FC236}">
-                <a16:creationId xmlns:a16="http://schemas.microsoft.com/office/drawing/2014/main" id="{8000B81E-5639-48B0-BE00-A14CF08E9B06}"/>
+                <a16:creationId xmlns:a16="http://schemas.microsoft.com/office/drawing/2014/main" id="{ED5EC16A-5DA6-4B6A-8C07-EDA0205914B9}"/>
               </a:ext>
             </a:extLst>
           </p:cNvPr>
@@ -2022,7 +2022,7 @@
           <p:cNvPr id="5" name="">
             <a:extLst xmlns:a="http://schemas.openxmlformats.org/drawingml/2006/main">
               <a:ext uri="{FF2B5EF4-FFF2-40B4-BE49-F238E27FC236}">
-                <a16:creationId xmlns:a16="http://schemas.microsoft.com/office/drawing/2014/main" id="{04966176-DD1F-46BD-95BC-43FF7564AA93}"/>
+                <a16:creationId xmlns:a16="http://schemas.microsoft.com/office/drawing/2014/main" id="{D0DFDDA2-235F-4F3B-983E-C989034C97BE}"/>
               </a:ext>
             </a:extLst>
           </p:cNvPr>
@@ -2079,7 +2079,7 @@
           <p:cNvPr id="6" name="">
             <a:extLst xmlns:a="http://schemas.openxmlformats.org/drawingml/2006/main">
               <a:ext uri="{FF2B5EF4-FFF2-40B4-BE49-F238E27FC236}">
-                <a16:creationId xmlns:a16="http://schemas.microsoft.com/office/drawing/2014/main" id="{84F26AF9-738E-43A1-A720-76CFD6E237A1}"/>
+                <a16:creationId xmlns:a16="http://schemas.microsoft.com/office/drawing/2014/main" id="{5CCB18B4-2E78-4AF0-B4F1-96915EA71485}"/>
               </a:ext>
             </a:extLst>
           </p:cNvPr>
@@ -2113,7 +2113,7 @@
           <p:cNvPr id="7" name="">
             <a:extLst xmlns:a="http://schemas.openxmlformats.org/drawingml/2006/main">
               <a:ext uri="{FF2B5EF4-FFF2-40B4-BE49-F238E27FC236}">
-                <a16:creationId xmlns:a16="http://schemas.microsoft.com/office/drawing/2014/main" id="{2553CE95-1034-4164-B05D-C8E4701ECD04}"/>
+                <a16:creationId xmlns:a16="http://schemas.microsoft.com/office/drawing/2014/main" id="{D59BCAF2-ABF8-4857-A3CD-5B51B94D8657}"/>
               </a:ext>
             </a:extLst>
           </p:cNvPr>
@@ -2170,7 +2170,7 @@
           <p:cNvPr id="8" name="">
             <a:extLst xmlns:a="http://schemas.openxmlformats.org/drawingml/2006/main">
               <a:ext uri="{FF2B5EF4-FFF2-40B4-BE49-F238E27FC236}">
-                <a16:creationId xmlns:a16="http://schemas.microsoft.com/office/drawing/2014/main" id="{6528D394-93B3-4B94-A135-00AE1C7D3720}"/>
+                <a16:creationId xmlns:a16="http://schemas.microsoft.com/office/drawing/2014/main" id="{5679E4BD-5CFF-4C13-A431-3B4CA38CF751}"/>
               </a:ext>
             </a:extLst>
           </p:cNvPr>
@@ -2227,7 +2227,7 @@
           <p:cNvPr id="9" name="">
             <a:extLst xmlns:a="http://schemas.openxmlformats.org/drawingml/2006/main">
               <a:ext uri="{FF2B5EF4-FFF2-40B4-BE49-F238E27FC236}">
-                <a16:creationId xmlns:a16="http://schemas.microsoft.com/office/drawing/2014/main" id="{CD662214-AA9C-4694-B51B-023F03353CE7}"/>
+                <a16:creationId xmlns:a16="http://schemas.microsoft.com/office/drawing/2014/main" id="{C289B33B-496C-4E6E-8063-6633BA1D1F2F}"/>
               </a:ext>
             </a:extLst>
           </p:cNvPr>
@@ -2284,7 +2284,7 @@
           <p:cNvPr id="10" name="">
             <a:extLst xmlns:a="http://schemas.openxmlformats.org/drawingml/2006/main">
               <a:ext uri="{FF2B5EF4-FFF2-40B4-BE49-F238E27FC236}">
-                <a16:creationId xmlns:a16="http://schemas.microsoft.com/office/drawing/2014/main" id="{131F5CEC-ECC8-429F-B65B-3521B4E02259}"/>
+                <a16:creationId xmlns:a16="http://schemas.microsoft.com/office/drawing/2014/main" id="{3D74289C-F22E-4E1E-A0BD-D2933533B973}"/>
               </a:ext>
             </a:extLst>
           </p:cNvPr>
@@ -2341,7 +2341,7 @@
           <p:cNvPr id="11" name="">
             <a:extLst xmlns:a="http://schemas.openxmlformats.org/drawingml/2006/main">
               <a:ext uri="{FF2B5EF4-FFF2-40B4-BE49-F238E27FC236}">
-                <a16:creationId xmlns:a16="http://schemas.microsoft.com/office/drawing/2014/main" id="{3EDEA279-EC7B-4AAA-A41B-0B78E42867CD}"/>
+                <a16:creationId xmlns:a16="http://schemas.microsoft.com/office/drawing/2014/main" id="{1AA2B73E-5D5A-4691-8736-62FB67895081}"/>
               </a:ext>
             </a:extLst>
           </p:cNvPr>
@@ -2396,7 +2396,7 @@
     </p:spTree>
     <p:extLst>
       <p:ext uri="{BB962C8B-B14F-4D97-AF65-F5344CB8AC3E}">
-        <p14:creationId xmlns:p14="http://schemas.microsoft.com/office/powerpoint/2010/main" val="1381806071"/>
+        <p14:creationId xmlns:p14="http://schemas.microsoft.com/office/powerpoint/2010/main" val="670545162"/>
       </p:ext>
     </p:extLst>
   </p:cSld>
@@ -2427,7 +2427,7 @@
           <p:cNvPr id="14" name="">
             <a:extLst xmlns:a="http://schemas.openxmlformats.org/drawingml/2006/main">
               <a:ext uri="{FF2B5EF4-FFF2-40B4-BE49-F238E27FC236}">
-                <a16:creationId xmlns:a16="http://schemas.microsoft.com/office/drawing/2014/main" id="{D68566BD-501B-4513-B45D-E960264813F1}"/>
+                <a16:creationId xmlns:a16="http://schemas.microsoft.com/office/drawing/2014/main" id="{C2A7C5F0-3363-45FC-856B-DBDEA8A1C5A8}"/>
               </a:ext>
             </a:extLst>
           </p:cNvPr>
@@ -2459,7 +2459,7 @@
           <p:cNvPr id="2" name="">
             <a:extLst xmlns:a="http://schemas.openxmlformats.org/drawingml/2006/main">
               <a:ext uri="{FF2B5EF4-FFF2-40B4-BE49-F238E27FC236}">
-                <a16:creationId xmlns:a16="http://schemas.microsoft.com/office/drawing/2014/main" id="{6B5E9078-0620-41E8-AA89-54CDDE95A464}"/>
+                <a16:creationId xmlns:a16="http://schemas.microsoft.com/office/drawing/2014/main" id="{AB5C5C3B-D734-4A26-9EC4-D13A3727FBD4}"/>
               </a:ext>
             </a:extLst>
           </p:cNvPr>
@@ -2516,7 +2516,7 @@
           <p:cNvPr id="3" name="">
             <a:extLst xmlns:a="http://schemas.openxmlformats.org/drawingml/2006/main">
               <a:ext uri="{FF2B5EF4-FFF2-40B4-BE49-F238E27FC236}">
-                <a16:creationId xmlns:a16="http://schemas.microsoft.com/office/drawing/2014/main" id="{87C815CF-1BD0-4B57-8CE6-D2ADE0F983B9}"/>
+                <a16:creationId xmlns:a16="http://schemas.microsoft.com/office/drawing/2014/main" id="{1497C61E-2CEE-473D-850F-EAB7E80DFF92}"/>
               </a:ext>
             </a:extLst>
           </p:cNvPr>
@@ -2548,7 +2548,7 @@
           <p:cNvPr id="4" name="">
             <a:extLst xmlns:a="http://schemas.openxmlformats.org/drawingml/2006/main">
               <a:ext uri="{FF2B5EF4-FFF2-40B4-BE49-F238E27FC236}">
-                <a16:creationId xmlns:a16="http://schemas.microsoft.com/office/drawing/2014/main" id="{47CF561D-1260-44C8-9599-706EA2A62E8B}"/>
+                <a16:creationId xmlns:a16="http://schemas.microsoft.com/office/drawing/2014/main" id="{574C3515-F21D-47C9-8C9E-67CD28D7D85C}"/>
               </a:ext>
             </a:extLst>
           </p:cNvPr>
@@ -2605,7 +2605,7 @@
           <p:cNvPr id="5" name="">
             <a:extLst xmlns:a="http://schemas.openxmlformats.org/drawingml/2006/main">
               <a:ext uri="{FF2B5EF4-FFF2-40B4-BE49-F238E27FC236}">
-                <a16:creationId xmlns:a16="http://schemas.microsoft.com/office/drawing/2014/main" id="{C25628CA-355F-4DAA-A43B-2B0CF0C55F21}"/>
+                <a16:creationId xmlns:a16="http://schemas.microsoft.com/office/drawing/2014/main" id="{99B270EC-F806-4ABB-9910-3F50E211A490}"/>
               </a:ext>
             </a:extLst>
           </p:cNvPr>
@@ -2662,7 +2662,7 @@
           <p:cNvPr id="6" name="">
             <a:extLst xmlns:a="http://schemas.openxmlformats.org/drawingml/2006/main">
               <a:ext uri="{FF2B5EF4-FFF2-40B4-BE49-F238E27FC236}">
-                <a16:creationId xmlns:a16="http://schemas.microsoft.com/office/drawing/2014/main" id="{937D12C3-2D4C-4907-A6FC-C7F6D5D32587}"/>
+                <a16:creationId xmlns:a16="http://schemas.microsoft.com/office/drawing/2014/main" id="{52CC6FD5-7A49-4EFE-BC5B-5F91A7E906EE}"/>
               </a:ext>
             </a:extLst>
           </p:cNvPr>
@@ -2719,7 +2719,7 @@
           <p:cNvPr id="7" name="">
             <a:extLst xmlns:a="http://schemas.openxmlformats.org/drawingml/2006/main">
               <a:ext uri="{FF2B5EF4-FFF2-40B4-BE49-F238E27FC236}">
-                <a16:creationId xmlns:a16="http://schemas.microsoft.com/office/drawing/2014/main" id="{FDF4A1EE-A094-4629-9C1A-74432DC44CBD}"/>
+                <a16:creationId xmlns:a16="http://schemas.microsoft.com/office/drawing/2014/main" id="{79ABB815-1C4E-41BC-BFEB-8D1B5BD009D3}"/>
               </a:ext>
             </a:extLst>
           </p:cNvPr>
@@ -2751,7 +2751,7 @@
           <p:cNvPr id="8" name="">
             <a:extLst xmlns:a="http://schemas.openxmlformats.org/drawingml/2006/main">
               <a:ext uri="{FF2B5EF4-FFF2-40B4-BE49-F238E27FC236}">
-                <a16:creationId xmlns:a16="http://schemas.microsoft.com/office/drawing/2014/main" id="{77E7C56B-D6FE-487F-BBF4-B6E0AA17EF9E}"/>
+                <a16:creationId xmlns:a16="http://schemas.microsoft.com/office/drawing/2014/main" id="{A19F3625-5393-4D22-8AB9-47EF0B666095}"/>
               </a:ext>
             </a:extLst>
           </p:cNvPr>
@@ -2808,7 +2808,7 @@
           <p:cNvPr id="9" name="">
             <a:extLst xmlns:a="http://schemas.openxmlformats.org/drawingml/2006/main">
               <a:ext uri="{FF2B5EF4-FFF2-40B4-BE49-F238E27FC236}">
-                <a16:creationId xmlns:a16="http://schemas.microsoft.com/office/drawing/2014/main" id="{113F96BE-BBFF-4375-ADBB-78C3D49097FD}"/>
+                <a16:creationId xmlns:a16="http://schemas.microsoft.com/office/drawing/2014/main" id="{FA5F53B5-0652-43ED-A9F3-662B45D6978F}"/>
               </a:ext>
             </a:extLst>
           </p:cNvPr>
@@ -2865,7 +2865,7 @@
           <p:cNvPr id="10" name="">
             <a:extLst xmlns:a="http://schemas.openxmlformats.org/drawingml/2006/main">
               <a:ext uri="{FF2B5EF4-FFF2-40B4-BE49-F238E27FC236}">
-                <a16:creationId xmlns:a16="http://schemas.microsoft.com/office/drawing/2014/main" id="{136FFE27-C6BE-4EC3-926E-595BBFDBD353}"/>
+                <a16:creationId xmlns:a16="http://schemas.microsoft.com/office/drawing/2014/main" id="{D574A750-2C3A-4C02-884B-315371ED49DF}"/>
               </a:ext>
             </a:extLst>
           </p:cNvPr>
@@ -2922,7 +2922,7 @@
           <p:cNvPr id="11" name="">
             <a:extLst xmlns:a="http://schemas.openxmlformats.org/drawingml/2006/main">
               <a:ext uri="{FF2B5EF4-FFF2-40B4-BE49-F238E27FC236}">
-                <a16:creationId xmlns:a16="http://schemas.microsoft.com/office/drawing/2014/main" id="{BB2121B0-9FED-4ADC-8F17-46715883D341}"/>
+                <a16:creationId xmlns:a16="http://schemas.microsoft.com/office/drawing/2014/main" id="{705C3B3D-A9D2-41D7-925F-20F72AE7A3AC}"/>
               </a:ext>
             </a:extLst>
           </p:cNvPr>
@@ -2979,7 +2979,7 @@
           <p:cNvPr id="12" name="">
             <a:extLst xmlns:a="http://schemas.openxmlformats.org/drawingml/2006/main">
               <a:ext uri="{FF2B5EF4-FFF2-40B4-BE49-F238E27FC236}">
-                <a16:creationId xmlns:a16="http://schemas.microsoft.com/office/drawing/2014/main" id="{38E3811B-95A1-4977-9933-4BDB97DF17B2}"/>
+                <a16:creationId xmlns:a16="http://schemas.microsoft.com/office/drawing/2014/main" id="{541B0B97-AB7C-47ED-8E21-47F197F8F64D}"/>
               </a:ext>
             </a:extLst>
           </p:cNvPr>
@@ -3036,7 +3036,7 @@
           <p:cNvPr id="13" name="">
             <a:extLst xmlns:a="http://schemas.openxmlformats.org/drawingml/2006/main">
               <a:ext uri="{FF2B5EF4-FFF2-40B4-BE49-F238E27FC236}">
-                <a16:creationId xmlns:a16="http://schemas.microsoft.com/office/drawing/2014/main" id="{101E7CAC-97A4-451A-A541-E177E3A0B8B1}"/>
+                <a16:creationId xmlns:a16="http://schemas.microsoft.com/office/drawing/2014/main" id="{165DDEC0-246D-4B03-9D8F-D563325FE308}"/>
               </a:ext>
             </a:extLst>
           </p:cNvPr>
@@ -3091,7 +3091,7 @@
     </p:spTree>
     <p:extLst>
       <p:ext uri="{BB962C8B-B14F-4D97-AF65-F5344CB8AC3E}">
-        <p14:creationId xmlns:p14="http://schemas.microsoft.com/office/powerpoint/2010/main" val="456096749"/>
+        <p14:creationId xmlns:p14="http://schemas.microsoft.com/office/powerpoint/2010/main" val="862111999"/>
       </p:ext>
     </p:extLst>
   </p:cSld>
@@ -3292,7 +3292,7 @@
           <p:cNvPr id="19" name="">
             <a:extLst xmlns:a="http://schemas.openxmlformats.org/drawingml/2006/main">
               <a:ext uri="{FF2B5EF4-FFF2-40B4-BE49-F238E27FC236}">
-                <a16:creationId xmlns:a16="http://schemas.microsoft.com/office/drawing/2014/main" id="{8178AC63-EF52-4F94-83E0-161EC0D4A5A4}"/>
+                <a16:creationId xmlns:a16="http://schemas.microsoft.com/office/drawing/2014/main" id="{33C3A9CF-8474-4F5C-BA22-EEDF3AFE0234}"/>
               </a:ext>
             </a:extLst>
           </p:cNvPr>
@@ -3324,7 +3324,7 @@
           <p:cNvPr id="2" name="">
             <a:extLst xmlns:a="http://schemas.openxmlformats.org/drawingml/2006/main">
               <a:ext uri="{FF2B5EF4-FFF2-40B4-BE49-F238E27FC236}">
-                <a16:creationId xmlns:a16="http://schemas.microsoft.com/office/drawing/2014/main" id="{A657744F-6DD3-46DA-A87A-3A8536923919}"/>
+                <a16:creationId xmlns:a16="http://schemas.microsoft.com/office/drawing/2014/main" id="{CCD6F915-68C4-4E53-934D-106E017AAA2F}"/>
               </a:ext>
             </a:extLst>
           </p:cNvPr>
@@ -3381,7 +3381,7 @@
           <p:cNvPr id="3" name="">
             <a:extLst xmlns:a="http://schemas.openxmlformats.org/drawingml/2006/main">
               <a:ext uri="{FF2B5EF4-FFF2-40B4-BE49-F238E27FC236}">
-                <a16:creationId xmlns:a16="http://schemas.microsoft.com/office/drawing/2014/main" id="{F02790CF-71A7-4B92-BB1D-6E4C61A2FBA6}"/>
+                <a16:creationId xmlns:a16="http://schemas.microsoft.com/office/drawing/2014/main" id="{8A56C476-653F-4321-BA7B-56F47D938DA3}"/>
               </a:ext>
             </a:extLst>
           </p:cNvPr>
@@ -3413,7 +3413,7 @@
           <p:cNvPr id="4" name="">
             <a:extLst xmlns:a="http://schemas.openxmlformats.org/drawingml/2006/main">
               <a:ext uri="{FF2B5EF4-FFF2-40B4-BE49-F238E27FC236}">
-                <a16:creationId xmlns:a16="http://schemas.microsoft.com/office/drawing/2014/main" id="{19196332-AB5E-462B-9E89-6FD453FBC91E}"/>
+                <a16:creationId xmlns:a16="http://schemas.microsoft.com/office/drawing/2014/main" id="{898903D4-D3C3-438A-BC64-4665CBC86C8C}"/>
               </a:ext>
             </a:extLst>
           </p:cNvPr>
@@ -3470,7 +3470,7 @@
           <p:cNvPr id="5" name="">
             <a:extLst xmlns:a="http://schemas.openxmlformats.org/drawingml/2006/main">
               <a:ext uri="{FF2B5EF4-FFF2-40B4-BE49-F238E27FC236}">
-                <a16:creationId xmlns:a16="http://schemas.microsoft.com/office/drawing/2014/main" id="{7FEE2CC8-C29F-4B54-8376-6CAE844C4704}"/>
+                <a16:creationId xmlns:a16="http://schemas.microsoft.com/office/drawing/2014/main" id="{5EC68AEB-2C66-4D26-A617-5DF00D5C95FB}"/>
               </a:ext>
             </a:extLst>
           </p:cNvPr>
@@ -3527,7 +3527,7 @@
           <p:cNvPr id="6" name="">
             <a:extLst xmlns:a="http://schemas.openxmlformats.org/drawingml/2006/main">
               <a:ext uri="{FF2B5EF4-FFF2-40B4-BE49-F238E27FC236}">
-                <a16:creationId xmlns:a16="http://schemas.microsoft.com/office/drawing/2014/main" id="{882A88C8-6352-4B50-9909-238CC38CE38F}"/>
+                <a16:creationId xmlns:a16="http://schemas.microsoft.com/office/drawing/2014/main" id="{DC972579-CA6E-4E12-9E16-85A71FF6462C}"/>
               </a:ext>
             </a:extLst>
           </p:cNvPr>
@@ -3584,7 +3584,7 @@
           <p:cNvPr id="7" name="">
             <a:extLst xmlns:a="http://schemas.openxmlformats.org/drawingml/2006/main">
               <a:ext uri="{FF2B5EF4-FFF2-40B4-BE49-F238E27FC236}">
-                <a16:creationId xmlns:a16="http://schemas.microsoft.com/office/drawing/2014/main" id="{F3A9125A-8DDD-4F5E-9106-5D0349240610}"/>
+                <a16:creationId xmlns:a16="http://schemas.microsoft.com/office/drawing/2014/main" id="{016B5DCE-4686-4E52-8225-86AD11B0B980}"/>
               </a:ext>
             </a:extLst>
           </p:cNvPr>
@@ -3616,7 +3616,7 @@
           <p:cNvPr id="8" name="">
             <a:extLst xmlns:a="http://schemas.openxmlformats.org/drawingml/2006/main">
               <a:ext uri="{FF2B5EF4-FFF2-40B4-BE49-F238E27FC236}">
-                <a16:creationId xmlns:a16="http://schemas.microsoft.com/office/drawing/2014/main" id="{E87F5AEF-1971-44AA-97BC-98E1499BE253}"/>
+                <a16:creationId xmlns:a16="http://schemas.microsoft.com/office/drawing/2014/main" id="{8BF4C72B-BC29-40AB-9E2D-6B936A831A2A}"/>
               </a:ext>
             </a:extLst>
           </p:cNvPr>
@@ -3673,7 +3673,7 @@
           <p:cNvPr id="9" name="">
             <a:extLst xmlns:a="http://schemas.openxmlformats.org/drawingml/2006/main">
               <a:ext uri="{FF2B5EF4-FFF2-40B4-BE49-F238E27FC236}">
-                <a16:creationId xmlns:a16="http://schemas.microsoft.com/office/drawing/2014/main" id="{A7ED398B-2236-4C4C-9006-EAC5D76A1B09}"/>
+                <a16:creationId xmlns:a16="http://schemas.microsoft.com/office/drawing/2014/main" id="{C1DB833D-F3AB-4C04-B7CE-95362F3B37B6}"/>
               </a:ext>
             </a:extLst>
           </p:cNvPr>
@@ -3730,7 +3730,7 @@
           <p:cNvPr id="10" name="">
             <a:extLst xmlns:a="http://schemas.openxmlformats.org/drawingml/2006/main">
               <a:ext uri="{FF2B5EF4-FFF2-40B4-BE49-F238E27FC236}">
-                <a16:creationId xmlns:a16="http://schemas.microsoft.com/office/drawing/2014/main" id="{68074E15-984F-4DB1-9784-25951AD5BA5A}"/>
+                <a16:creationId xmlns:a16="http://schemas.microsoft.com/office/drawing/2014/main" id="{9E6E6012-2381-4BBA-837F-2BB72EDA87E1}"/>
               </a:ext>
             </a:extLst>
           </p:cNvPr>
@@ -3787,7 +3787,7 @@
           <p:cNvPr id="11" name="">
             <a:extLst xmlns:a="http://schemas.openxmlformats.org/drawingml/2006/main">
               <a:ext uri="{FF2B5EF4-FFF2-40B4-BE49-F238E27FC236}">
-                <a16:creationId xmlns:a16="http://schemas.microsoft.com/office/drawing/2014/main" id="{F3CF411A-04C7-4832-904A-1B95F34C9698}"/>
+                <a16:creationId xmlns:a16="http://schemas.microsoft.com/office/drawing/2014/main" id="{2F46BC23-EE10-4D76-AEF2-664DD2E97C81}"/>
               </a:ext>
             </a:extLst>
           </p:cNvPr>
@@ -3821,7 +3821,7 @@
           <p:cNvPr id="12" name="">
             <a:extLst xmlns:a="http://schemas.openxmlformats.org/drawingml/2006/main">
               <a:ext uri="{FF2B5EF4-FFF2-40B4-BE49-F238E27FC236}">
-                <a16:creationId xmlns:a16="http://schemas.microsoft.com/office/drawing/2014/main" id="{A47FE280-5A81-403F-B757-28AB8C8E7C20}"/>
+                <a16:creationId xmlns:a16="http://schemas.microsoft.com/office/drawing/2014/main" id="{E2416B4C-E8BE-454F-B081-30ECD2500815}"/>
               </a:ext>
             </a:extLst>
           </p:cNvPr>
@@ -3878,7 +3878,7 @@
           <p:cNvPr id="13" name="">
             <a:extLst xmlns:a="http://schemas.openxmlformats.org/drawingml/2006/main">
               <a:ext uri="{FF2B5EF4-FFF2-40B4-BE49-F238E27FC236}">
-                <a16:creationId xmlns:a16="http://schemas.microsoft.com/office/drawing/2014/main" id="{D80F2C92-82D0-4A33-80FA-B67C5AA861F0}"/>
+                <a16:creationId xmlns:a16="http://schemas.microsoft.com/office/drawing/2014/main" id="{9DB34F54-5DCC-4C6F-8925-E0865C54D047}"/>
               </a:ext>
             </a:extLst>
           </p:cNvPr>
@@ -3935,7 +3935,7 @@
           <p:cNvPr id="14" name="">
             <a:extLst xmlns:a="http://schemas.openxmlformats.org/drawingml/2006/main">
               <a:ext uri="{FF2B5EF4-FFF2-40B4-BE49-F238E27FC236}">
-                <a16:creationId xmlns:a16="http://schemas.microsoft.com/office/drawing/2014/main" id="{233DE45E-341D-44A4-85E3-B6154FDA42FB}"/>
+                <a16:creationId xmlns:a16="http://schemas.microsoft.com/office/drawing/2014/main" id="{2D7DA076-8C20-403D-B3F4-82532297C708}"/>
               </a:ext>
             </a:extLst>
           </p:cNvPr>
@@ -3992,7 +3992,7 @@
           <p:cNvPr id="15" name="">
             <a:extLst xmlns:a="http://schemas.openxmlformats.org/drawingml/2006/main">
               <a:ext uri="{FF2B5EF4-FFF2-40B4-BE49-F238E27FC236}">
-                <a16:creationId xmlns:a16="http://schemas.microsoft.com/office/drawing/2014/main" id="{38A9BBF4-218C-44CB-83F5-86C83E0304EB}"/>
+                <a16:creationId xmlns:a16="http://schemas.microsoft.com/office/drawing/2014/main" id="{F88D5BB7-71AA-42C6-824C-0D332F929F6C}"/>
               </a:ext>
             </a:extLst>
           </p:cNvPr>
@@ -4026,7 +4026,7 @@
           <p:cNvPr id="16" name="">
             <a:extLst xmlns:a="http://schemas.openxmlformats.org/drawingml/2006/main">
               <a:ext uri="{FF2B5EF4-FFF2-40B4-BE49-F238E27FC236}">
-                <a16:creationId xmlns:a16="http://schemas.microsoft.com/office/drawing/2014/main" id="{C79326FF-27A9-42C9-A5C7-7525377B15F6}"/>
+                <a16:creationId xmlns:a16="http://schemas.microsoft.com/office/drawing/2014/main" id="{9C4C7488-A123-4E70-94D4-1DEF3880140F}"/>
               </a:ext>
             </a:extLst>
           </p:cNvPr>
@@ -4083,7 +4083,7 @@
           <p:cNvPr id="17" name="">
             <a:extLst xmlns:a="http://schemas.openxmlformats.org/drawingml/2006/main">
               <a:ext uri="{FF2B5EF4-FFF2-40B4-BE49-F238E27FC236}">
-                <a16:creationId xmlns:a16="http://schemas.microsoft.com/office/drawing/2014/main" id="{838E8CFC-6995-4449-8046-CE9E282FED17}"/>
+                <a16:creationId xmlns:a16="http://schemas.microsoft.com/office/drawing/2014/main" id="{EAA674BF-6958-48AC-9AB3-0DE5A00A24CC}"/>
               </a:ext>
             </a:extLst>
           </p:cNvPr>
@@ -4140,7 +4140,7 @@
           <p:cNvPr id="18" name="">
             <a:extLst xmlns:a="http://schemas.openxmlformats.org/drawingml/2006/main">
               <a:ext uri="{FF2B5EF4-FFF2-40B4-BE49-F238E27FC236}">
-                <a16:creationId xmlns:a16="http://schemas.microsoft.com/office/drawing/2014/main" id="{093469AF-309E-4D1E-9E35-572352F93BA0}"/>
+                <a16:creationId xmlns:a16="http://schemas.microsoft.com/office/drawing/2014/main" id="{63C45270-EEF4-4EDB-A53A-FFC8F6CA0204}"/>
               </a:ext>
             </a:extLst>
           </p:cNvPr>
@@ -4195,7 +4195,7 @@
     </p:spTree>
     <p:extLst>
       <p:ext uri="{BB962C8B-B14F-4D97-AF65-F5344CB8AC3E}">
-        <p14:creationId xmlns:p14="http://schemas.microsoft.com/office/powerpoint/2010/main" val="1834544851"/>
+        <p14:creationId xmlns:p14="http://schemas.microsoft.com/office/powerpoint/2010/main" val="1580994512"/>
       </p:ext>
     </p:extLst>
   </p:cSld>
@@ -4350,7 +4350,7 @@
           <p:cNvPr id="23" name="">
             <a:extLst xmlns:a="http://schemas.openxmlformats.org/drawingml/2006/main">
               <a:ext uri="{FF2B5EF4-FFF2-40B4-BE49-F238E27FC236}">
-                <a16:creationId xmlns:a16="http://schemas.microsoft.com/office/drawing/2014/main" id="{C7D67BD8-9367-42C1-9A72-CA1E8492B719}"/>
+                <a16:creationId xmlns:a16="http://schemas.microsoft.com/office/drawing/2014/main" id="{FC38F490-1809-4CA9-A1FB-6F4F0A452EEF}"/>
               </a:ext>
             </a:extLst>
           </p:cNvPr>
@@ -4382,7 +4382,7 @@
           <p:cNvPr id="2" name="">
             <a:extLst xmlns:a="http://schemas.openxmlformats.org/drawingml/2006/main">
               <a:ext uri="{FF2B5EF4-FFF2-40B4-BE49-F238E27FC236}">
-                <a16:creationId xmlns:a16="http://schemas.microsoft.com/office/drawing/2014/main" id="{8F55695D-1AB6-46F0-B702-25A0F5014319}"/>
+                <a16:creationId xmlns:a16="http://schemas.microsoft.com/office/drawing/2014/main" id="{2B128A31-B80B-4370-9B29-775E593F7B61}"/>
               </a:ext>
             </a:extLst>
           </p:cNvPr>
@@ -4439,7 +4439,7 @@
           <p:cNvPr id="3" name="">
             <a:extLst xmlns:a="http://schemas.openxmlformats.org/drawingml/2006/main">
               <a:ext uri="{FF2B5EF4-FFF2-40B4-BE49-F238E27FC236}">
-                <a16:creationId xmlns:a16="http://schemas.microsoft.com/office/drawing/2014/main" id="{2C0FBFF4-C6C4-4A39-A497-027CDD0C5032}"/>
+                <a16:creationId xmlns:a16="http://schemas.microsoft.com/office/drawing/2014/main" id="{35A5F5A3-2EA6-4227-A7B3-B6BA874CD3BF}"/>
               </a:ext>
             </a:extLst>
           </p:cNvPr>
@@ -4471,7 +4471,7 @@
           <p:cNvPr id="4" name="">
             <a:extLst xmlns:a="http://schemas.openxmlformats.org/drawingml/2006/main">
               <a:ext uri="{FF2B5EF4-FFF2-40B4-BE49-F238E27FC236}">
-                <a16:creationId xmlns:a16="http://schemas.microsoft.com/office/drawing/2014/main" id="{6B2EA928-AC3C-4E26-9031-125228DE2F48}"/>
+                <a16:creationId xmlns:a16="http://schemas.microsoft.com/office/drawing/2014/main" id="{F6FC4CE7-21E7-4A1E-B8E0-D1A04975902F}"/>
               </a:ext>
             </a:extLst>
           </p:cNvPr>
@@ -4528,7 +4528,7 @@
           <p:cNvPr id="5" name="">
             <a:extLst xmlns:a="http://schemas.openxmlformats.org/drawingml/2006/main">
               <a:ext uri="{FF2B5EF4-FFF2-40B4-BE49-F238E27FC236}">
-                <a16:creationId xmlns:a16="http://schemas.microsoft.com/office/drawing/2014/main" id="{56B38486-25BB-44AC-A31F-5085A06870CD}"/>
+                <a16:creationId xmlns:a16="http://schemas.microsoft.com/office/drawing/2014/main" id="{1BE3DB46-FECE-41E0-8942-6B0CF7D7FAC9}"/>
               </a:ext>
             </a:extLst>
           </p:cNvPr>
@@ -4585,7 +4585,7 @@
           <p:cNvPr id="6" name="">
             <a:extLst xmlns:a="http://schemas.openxmlformats.org/drawingml/2006/main">
               <a:ext uri="{FF2B5EF4-FFF2-40B4-BE49-F238E27FC236}">
-                <a16:creationId xmlns:a16="http://schemas.microsoft.com/office/drawing/2014/main" id="{59AE20BE-6828-4586-81B6-3B00371B2A93}"/>
+                <a16:creationId xmlns:a16="http://schemas.microsoft.com/office/drawing/2014/main" id="{5461AE71-55EF-4669-87CD-0CE3B23E05B0}"/>
               </a:ext>
             </a:extLst>
           </p:cNvPr>
@@ -4642,7 +4642,7 @@
           <p:cNvPr id="7" name="">
             <a:extLst xmlns:a="http://schemas.openxmlformats.org/drawingml/2006/main">
               <a:ext uri="{FF2B5EF4-FFF2-40B4-BE49-F238E27FC236}">
-                <a16:creationId xmlns:a16="http://schemas.microsoft.com/office/drawing/2014/main" id="{A55DAC6B-31F4-44E1-8F15-364DB8406AA0}"/>
+                <a16:creationId xmlns:a16="http://schemas.microsoft.com/office/drawing/2014/main" id="{84F08538-1791-47C2-9501-BFD35F849B3A}"/>
               </a:ext>
             </a:extLst>
           </p:cNvPr>
@@ -4674,7 +4674,7 @@
           <p:cNvPr id="8" name="">
             <a:extLst xmlns:a="http://schemas.openxmlformats.org/drawingml/2006/main">
               <a:ext uri="{FF2B5EF4-FFF2-40B4-BE49-F238E27FC236}">
-                <a16:creationId xmlns:a16="http://schemas.microsoft.com/office/drawing/2014/main" id="{538BD328-32B0-4D96-A1CE-918EC754DA7F}"/>
+                <a16:creationId xmlns:a16="http://schemas.microsoft.com/office/drawing/2014/main" id="{7E3762DA-FA48-4995-8B63-7074E4CFFAB1}"/>
               </a:ext>
             </a:extLst>
           </p:cNvPr>
@@ -4731,7 +4731,7 @@
           <p:cNvPr id="9" name="">
             <a:extLst xmlns:a="http://schemas.openxmlformats.org/drawingml/2006/main">
               <a:ext uri="{FF2B5EF4-FFF2-40B4-BE49-F238E27FC236}">
-                <a16:creationId xmlns:a16="http://schemas.microsoft.com/office/drawing/2014/main" id="{0800BABE-CBBA-4878-824A-1EDCB898C96A}"/>
+                <a16:creationId xmlns:a16="http://schemas.microsoft.com/office/drawing/2014/main" id="{CEB616FB-FD2F-4B9F-A94A-7C8D3C4F8A02}"/>
               </a:ext>
             </a:extLst>
           </p:cNvPr>
@@ -4788,7 +4788,7 @@
           <p:cNvPr id="10" name="">
             <a:extLst xmlns:a="http://schemas.openxmlformats.org/drawingml/2006/main">
               <a:ext uri="{FF2B5EF4-FFF2-40B4-BE49-F238E27FC236}">
-                <a16:creationId xmlns:a16="http://schemas.microsoft.com/office/drawing/2014/main" id="{1CD6B06C-B986-460B-B976-AC618803150C}"/>
+                <a16:creationId xmlns:a16="http://schemas.microsoft.com/office/drawing/2014/main" id="{85EC2786-F4F9-4F97-B848-1C4C58DA993C}"/>
               </a:ext>
             </a:extLst>
           </p:cNvPr>
@@ -4822,7 +4822,7 @@
           <p:cNvPr id="11" name="">
             <a:extLst xmlns:a="http://schemas.openxmlformats.org/drawingml/2006/main">
               <a:ext uri="{FF2B5EF4-FFF2-40B4-BE49-F238E27FC236}">
-                <a16:creationId xmlns:a16="http://schemas.microsoft.com/office/drawing/2014/main" id="{C69318F2-F055-4321-AE4E-52B578BDADBC}"/>
+                <a16:creationId xmlns:a16="http://schemas.microsoft.com/office/drawing/2014/main" id="{6D47D7E9-6064-4D16-AC34-F75D6FFABBD2}"/>
               </a:ext>
             </a:extLst>
           </p:cNvPr>
@@ -4854,7 +4854,7 @@
           <p:cNvPr id="12" name="">
             <a:extLst xmlns:a="http://schemas.openxmlformats.org/drawingml/2006/main">
               <a:ext uri="{FF2B5EF4-FFF2-40B4-BE49-F238E27FC236}">
-                <a16:creationId xmlns:a16="http://schemas.microsoft.com/office/drawing/2014/main" id="{D59A01B4-C827-4235-9B3B-5A8411E64887}"/>
+                <a16:creationId xmlns:a16="http://schemas.microsoft.com/office/drawing/2014/main" id="{BFB5E5C2-1F44-4714-806E-40870FC78723}"/>
               </a:ext>
             </a:extLst>
           </p:cNvPr>
@@ -4911,7 +4911,7 @@
           <p:cNvPr id="13" name="">
             <a:extLst xmlns:a="http://schemas.openxmlformats.org/drawingml/2006/main">
               <a:ext uri="{FF2B5EF4-FFF2-40B4-BE49-F238E27FC236}">
-                <a16:creationId xmlns:a16="http://schemas.microsoft.com/office/drawing/2014/main" id="{2686ACD7-7307-4A18-A76E-8D24DDDEC94D}"/>
+                <a16:creationId xmlns:a16="http://schemas.microsoft.com/office/drawing/2014/main" id="{02BE8DAE-8FAF-4C6A-B711-C07D5F594683}"/>
               </a:ext>
             </a:extLst>
           </p:cNvPr>
@@ -4968,7 +4968,7 @@
           <p:cNvPr id="14" name="">
             <a:extLst xmlns:a="http://schemas.openxmlformats.org/drawingml/2006/main">
               <a:ext uri="{FF2B5EF4-FFF2-40B4-BE49-F238E27FC236}">
-                <a16:creationId xmlns:a16="http://schemas.microsoft.com/office/drawing/2014/main" id="{F7403F48-38B9-468A-885E-2F0EC2BB3DB9}"/>
+                <a16:creationId xmlns:a16="http://schemas.microsoft.com/office/drawing/2014/main" id="{A72C95D9-EC2D-49D1-A771-5EA6E3863E7F}"/>
               </a:ext>
             </a:extLst>
           </p:cNvPr>
@@ -5002,7 +5002,7 @@
           <p:cNvPr id="15" name="">
             <a:extLst xmlns:a="http://schemas.openxmlformats.org/drawingml/2006/main">
               <a:ext uri="{FF2B5EF4-FFF2-40B4-BE49-F238E27FC236}">
-                <a16:creationId xmlns:a16="http://schemas.microsoft.com/office/drawing/2014/main" id="{AE1B1CE7-292E-49CF-B38C-6A97FF3F0C18}"/>
+                <a16:creationId xmlns:a16="http://schemas.microsoft.com/office/drawing/2014/main" id="{CE7154AA-6622-4839-8EF4-31EAF042A19B}"/>
               </a:ext>
             </a:extLst>
           </p:cNvPr>
@@ -5034,7 +5034,7 @@
           <p:cNvPr id="16" name="">
             <a:extLst xmlns:a="http://schemas.openxmlformats.org/drawingml/2006/main">
               <a:ext uri="{FF2B5EF4-FFF2-40B4-BE49-F238E27FC236}">
-                <a16:creationId xmlns:a16="http://schemas.microsoft.com/office/drawing/2014/main" id="{20FFE04D-4E42-4AE7-B06D-0C8889C64E43}"/>
+                <a16:creationId xmlns:a16="http://schemas.microsoft.com/office/drawing/2014/main" id="{007C908E-C4F6-4314-AA9D-1C6D3790E42D}"/>
               </a:ext>
             </a:extLst>
           </p:cNvPr>
@@ -5091,7 +5091,7 @@
           <p:cNvPr id="17" name="">
             <a:extLst xmlns:a="http://schemas.openxmlformats.org/drawingml/2006/main">
               <a:ext uri="{FF2B5EF4-FFF2-40B4-BE49-F238E27FC236}">
-                <a16:creationId xmlns:a16="http://schemas.microsoft.com/office/drawing/2014/main" id="{E8BE63C6-75CA-47EB-9BFB-808F5BC88598}"/>
+                <a16:creationId xmlns:a16="http://schemas.microsoft.com/office/drawing/2014/main" id="{DB3E1C9B-F2EF-4CB9-9270-23BFD2E06F86}"/>
               </a:ext>
             </a:extLst>
           </p:cNvPr>
@@ -5148,7 +5148,7 @@
           <p:cNvPr id="18" name="">
             <a:extLst xmlns:a="http://schemas.openxmlformats.org/drawingml/2006/main">
               <a:ext uri="{FF2B5EF4-FFF2-40B4-BE49-F238E27FC236}">
-                <a16:creationId xmlns:a16="http://schemas.microsoft.com/office/drawing/2014/main" id="{D62A3EC5-BB15-4049-840B-AA90EAC191B5}"/>
+                <a16:creationId xmlns:a16="http://schemas.microsoft.com/office/drawing/2014/main" id="{11EEE854-639D-4998-BB4A-BDA28F142627}"/>
               </a:ext>
             </a:extLst>
           </p:cNvPr>
@@ -5182,7 +5182,7 @@
           <p:cNvPr id="19" name="">
             <a:extLst xmlns:a="http://schemas.openxmlformats.org/drawingml/2006/main">
               <a:ext uri="{FF2B5EF4-FFF2-40B4-BE49-F238E27FC236}">
-                <a16:creationId xmlns:a16="http://schemas.microsoft.com/office/drawing/2014/main" id="{1FF93C93-7826-47AC-9CC4-67B79961D32A}"/>
+                <a16:creationId xmlns:a16="http://schemas.microsoft.com/office/drawing/2014/main" id="{18A7F658-F267-48E3-8304-6924294617DC}"/>
               </a:ext>
             </a:extLst>
           </p:cNvPr>
@@ -5214,7 +5214,7 @@
           <p:cNvPr id="20" name="">
             <a:extLst xmlns:a="http://schemas.openxmlformats.org/drawingml/2006/main">
               <a:ext uri="{FF2B5EF4-FFF2-40B4-BE49-F238E27FC236}">
-                <a16:creationId xmlns:a16="http://schemas.microsoft.com/office/drawing/2014/main" id="{E872BF3F-B557-419C-8E51-E08C65E85DDA}"/>
+                <a16:creationId xmlns:a16="http://schemas.microsoft.com/office/drawing/2014/main" id="{B97D5C59-6783-460E-BF8C-6205CCAD0EB0}"/>
               </a:ext>
             </a:extLst>
           </p:cNvPr>
@@ -5271,7 +5271,7 @@
           <p:cNvPr id="21" name="">
             <a:extLst xmlns:a="http://schemas.openxmlformats.org/drawingml/2006/main">
               <a:ext uri="{FF2B5EF4-FFF2-40B4-BE49-F238E27FC236}">
-                <a16:creationId xmlns:a16="http://schemas.microsoft.com/office/drawing/2014/main" id="{B727CDF3-6242-46DF-8079-BC3C95F8010D}"/>
+                <a16:creationId xmlns:a16="http://schemas.microsoft.com/office/drawing/2014/main" id="{ACCC67E5-8638-4737-9E7E-B86F71A2D13C}"/>
               </a:ext>
             </a:extLst>
           </p:cNvPr>
@@ -5328,7 +5328,7 @@
           <p:cNvPr id="22" name="">
             <a:extLst xmlns:a="http://schemas.openxmlformats.org/drawingml/2006/main">
               <a:ext uri="{FF2B5EF4-FFF2-40B4-BE49-F238E27FC236}">
-                <a16:creationId xmlns:a16="http://schemas.microsoft.com/office/drawing/2014/main" id="{E59C2BF0-7ABB-4841-8F96-59698664BE1D}"/>
+                <a16:creationId xmlns:a16="http://schemas.microsoft.com/office/drawing/2014/main" id="{0970A9A9-A1C7-42D4-A1C1-F606B886B95D}"/>
               </a:ext>
             </a:extLst>
           </p:cNvPr>
@@ -5383,7 +5383,7 @@
     </p:spTree>
     <p:extLst>
       <p:ext uri="{BB962C8B-B14F-4D97-AF65-F5344CB8AC3E}">
-        <p14:creationId xmlns:p14="http://schemas.microsoft.com/office/powerpoint/2010/main" val="994513305"/>
+        <p14:creationId xmlns:p14="http://schemas.microsoft.com/office/powerpoint/2010/main" val="1253441615"/>
       </p:ext>
     </p:extLst>
   </p:cSld>
@@ -5584,7 +5584,7 @@
           <p:cNvPr id="23" name="">
             <a:extLst xmlns:a="http://schemas.openxmlformats.org/drawingml/2006/main">
               <a:ext uri="{FF2B5EF4-FFF2-40B4-BE49-F238E27FC236}">
-                <a16:creationId xmlns:a16="http://schemas.microsoft.com/office/drawing/2014/main" id="{5CE33928-644A-4014-BEA4-94EA94F9663B}"/>
+                <a16:creationId xmlns:a16="http://schemas.microsoft.com/office/drawing/2014/main" id="{DE7FA5DB-F425-4343-BF2A-C4ADCDEA6096}"/>
               </a:ext>
             </a:extLst>
           </p:cNvPr>
@@ -5616,7 +5616,7 @@
           <p:cNvPr id="2" name="">
             <a:extLst xmlns:a="http://schemas.openxmlformats.org/drawingml/2006/main">
               <a:ext uri="{FF2B5EF4-FFF2-40B4-BE49-F238E27FC236}">
-                <a16:creationId xmlns:a16="http://schemas.microsoft.com/office/drawing/2014/main" id="{E31951B2-081B-4ABA-94F1-9CD35B42F5A4}"/>
+                <a16:creationId xmlns:a16="http://schemas.microsoft.com/office/drawing/2014/main" id="{05BC61BA-D15A-4C0C-9556-942EB9BE4F41}"/>
               </a:ext>
             </a:extLst>
           </p:cNvPr>
@@ -5673,7 +5673,7 @@
           <p:cNvPr id="3" name="">
             <a:extLst xmlns:a="http://schemas.openxmlformats.org/drawingml/2006/main">
               <a:ext uri="{FF2B5EF4-FFF2-40B4-BE49-F238E27FC236}">
-                <a16:creationId xmlns:a16="http://schemas.microsoft.com/office/drawing/2014/main" id="{1439C55A-D4C2-4BC6-8806-B4CE4C86859D}"/>
+                <a16:creationId xmlns:a16="http://schemas.microsoft.com/office/drawing/2014/main" id="{AFD0A2AA-31D0-495B-A9D0-C3284C17CA23}"/>
               </a:ext>
             </a:extLst>
           </p:cNvPr>
@@ -5705,7 +5705,7 @@
           <p:cNvPr id="4" name="">
             <a:extLst xmlns:a="http://schemas.openxmlformats.org/drawingml/2006/main">
               <a:ext uri="{FF2B5EF4-FFF2-40B4-BE49-F238E27FC236}">
-                <a16:creationId xmlns:a16="http://schemas.microsoft.com/office/drawing/2014/main" id="{C218F5F9-0919-4263-8904-6387E6B8E8C2}"/>
+                <a16:creationId xmlns:a16="http://schemas.microsoft.com/office/drawing/2014/main" id="{2CD869B7-5B40-48A7-AF5F-E923763E39AD}"/>
               </a:ext>
             </a:extLst>
           </p:cNvPr>
@@ -5762,7 +5762,7 @@
           <p:cNvPr id="5" name="">
             <a:extLst xmlns:a="http://schemas.openxmlformats.org/drawingml/2006/main">
               <a:ext uri="{FF2B5EF4-FFF2-40B4-BE49-F238E27FC236}">
-                <a16:creationId xmlns:a16="http://schemas.microsoft.com/office/drawing/2014/main" id="{DCFF4A7A-8A8C-4A91-B601-A3DA529804CA}"/>
+                <a16:creationId xmlns:a16="http://schemas.microsoft.com/office/drawing/2014/main" id="{4C51157B-AED2-4A79-BCD8-246036B9C036}"/>
               </a:ext>
             </a:extLst>
           </p:cNvPr>
@@ -5819,7 +5819,7 @@
           <p:cNvPr id="6" name="">
             <a:extLst xmlns:a="http://schemas.openxmlformats.org/drawingml/2006/main">
               <a:ext uri="{FF2B5EF4-FFF2-40B4-BE49-F238E27FC236}">
-                <a16:creationId xmlns:a16="http://schemas.microsoft.com/office/drawing/2014/main" id="{09134DAF-9FF0-4E61-B75E-2B635A9A8D66}"/>
+                <a16:creationId xmlns:a16="http://schemas.microsoft.com/office/drawing/2014/main" id="{D8ED48E4-7370-49CA-97C3-B6405545C91F}"/>
               </a:ext>
             </a:extLst>
           </p:cNvPr>
@@ -5876,7 +5876,7 @@
           <p:cNvPr id="7" name="">
             <a:extLst xmlns:a="http://schemas.openxmlformats.org/drawingml/2006/main">
               <a:ext uri="{FF2B5EF4-FFF2-40B4-BE49-F238E27FC236}">
-                <a16:creationId xmlns:a16="http://schemas.microsoft.com/office/drawing/2014/main" id="{36D21648-4092-4E79-9D1A-3BE5B1ACEBA5}"/>
+                <a16:creationId xmlns:a16="http://schemas.microsoft.com/office/drawing/2014/main" id="{036B12A6-495D-4819-8E98-D040119A070D}"/>
               </a:ext>
             </a:extLst>
           </p:cNvPr>
@@ -5908,7 +5908,7 @@
           <p:cNvPr id="8" name="">
             <a:extLst xmlns:a="http://schemas.openxmlformats.org/drawingml/2006/main">
               <a:ext uri="{FF2B5EF4-FFF2-40B4-BE49-F238E27FC236}">
-                <a16:creationId xmlns:a16="http://schemas.microsoft.com/office/drawing/2014/main" id="{12AFF0B5-9658-466E-91DD-15426575A531}"/>
+                <a16:creationId xmlns:a16="http://schemas.microsoft.com/office/drawing/2014/main" id="{DA3747AE-33EE-4606-BD26-E6306D3AFBC9}"/>
               </a:ext>
             </a:extLst>
           </p:cNvPr>
@@ -5965,7 +5965,7 @@
           <p:cNvPr id="9" name="">
             <a:extLst xmlns:a="http://schemas.openxmlformats.org/drawingml/2006/main">
               <a:ext uri="{FF2B5EF4-FFF2-40B4-BE49-F238E27FC236}">
-                <a16:creationId xmlns:a16="http://schemas.microsoft.com/office/drawing/2014/main" id="{4FC5327F-B5EA-4954-8745-1B888948D11A}"/>
+                <a16:creationId xmlns:a16="http://schemas.microsoft.com/office/drawing/2014/main" id="{4C769450-9DEF-4F0A-B0B5-C2B6140E703A}"/>
               </a:ext>
             </a:extLst>
           </p:cNvPr>
@@ -6022,7 +6022,7 @@
           <p:cNvPr id="10" name="">
             <a:extLst xmlns:a="http://schemas.openxmlformats.org/drawingml/2006/main">
               <a:ext uri="{FF2B5EF4-FFF2-40B4-BE49-F238E27FC236}">
-                <a16:creationId xmlns:a16="http://schemas.microsoft.com/office/drawing/2014/main" id="{2E946827-6C06-470C-B6A8-5A742384A3EF}"/>
+                <a16:creationId xmlns:a16="http://schemas.microsoft.com/office/drawing/2014/main" id="{32270ED0-AB26-4E26-8116-BB3029B077D5}"/>
               </a:ext>
             </a:extLst>
           </p:cNvPr>
@@ -6056,7 +6056,7 @@
           <p:cNvPr id="11" name="">
             <a:extLst xmlns:a="http://schemas.openxmlformats.org/drawingml/2006/main">
               <a:ext uri="{FF2B5EF4-FFF2-40B4-BE49-F238E27FC236}">
-                <a16:creationId xmlns:a16="http://schemas.microsoft.com/office/drawing/2014/main" id="{ACCD61D6-8563-471C-90F9-7F5EFD3DD22F}"/>
+                <a16:creationId xmlns:a16="http://schemas.microsoft.com/office/drawing/2014/main" id="{7607AB58-A211-4AED-9681-B48D91C45B44}"/>
               </a:ext>
             </a:extLst>
           </p:cNvPr>
@@ -6088,7 +6088,7 @@
           <p:cNvPr id="12" name="">
             <a:extLst xmlns:a="http://schemas.openxmlformats.org/drawingml/2006/main">
               <a:ext uri="{FF2B5EF4-FFF2-40B4-BE49-F238E27FC236}">
-                <a16:creationId xmlns:a16="http://schemas.microsoft.com/office/drawing/2014/main" id="{A62923D7-3384-410B-BE1F-F4AAF3BA3C6E}"/>
+                <a16:creationId xmlns:a16="http://schemas.microsoft.com/office/drawing/2014/main" id="{CC3845C7-56C2-4159-B441-434152C8F500}"/>
               </a:ext>
             </a:extLst>
           </p:cNvPr>
@@ -6145,7 +6145,7 @@
           <p:cNvPr id="13" name="">
             <a:extLst xmlns:a="http://schemas.openxmlformats.org/drawingml/2006/main">
               <a:ext uri="{FF2B5EF4-FFF2-40B4-BE49-F238E27FC236}">
-                <a16:creationId xmlns:a16="http://schemas.microsoft.com/office/drawing/2014/main" id="{3A947850-2655-4BE7-A7D3-B3D37FA1FBED}"/>
+                <a16:creationId xmlns:a16="http://schemas.microsoft.com/office/drawing/2014/main" id="{C70B04EA-830E-4D9D-BBBD-26F567A82DC2}"/>
               </a:ext>
             </a:extLst>
           </p:cNvPr>
@@ -6202,7 +6202,7 @@
           <p:cNvPr id="14" name="">
             <a:extLst xmlns:a="http://schemas.openxmlformats.org/drawingml/2006/main">
               <a:ext uri="{FF2B5EF4-FFF2-40B4-BE49-F238E27FC236}">
-                <a16:creationId xmlns:a16="http://schemas.microsoft.com/office/drawing/2014/main" id="{FDE545F9-FBBE-41E1-B20F-EB2D1CA99DDA}"/>
+                <a16:creationId xmlns:a16="http://schemas.microsoft.com/office/drawing/2014/main" id="{5FB8F4B5-89A0-4F5F-9D7A-1F30E2293FB0}"/>
               </a:ext>
             </a:extLst>
           </p:cNvPr>
@@ -6236,7 +6236,7 @@
           <p:cNvPr id="15" name="">
             <a:extLst xmlns:a="http://schemas.openxmlformats.org/drawingml/2006/main">
               <a:ext uri="{FF2B5EF4-FFF2-40B4-BE49-F238E27FC236}">
-                <a16:creationId xmlns:a16="http://schemas.microsoft.com/office/drawing/2014/main" id="{EACE47E7-A554-4E17-8FF8-811ED37D7553}"/>
+                <a16:creationId xmlns:a16="http://schemas.microsoft.com/office/drawing/2014/main" id="{930604F8-7053-4262-947E-B1514E170F82}"/>
               </a:ext>
             </a:extLst>
           </p:cNvPr>
@@ -6268,7 +6268,7 @@
           <p:cNvPr id="16" name="">
             <a:extLst xmlns:a="http://schemas.openxmlformats.org/drawingml/2006/main">
               <a:ext uri="{FF2B5EF4-FFF2-40B4-BE49-F238E27FC236}">
-                <a16:creationId xmlns:a16="http://schemas.microsoft.com/office/drawing/2014/main" id="{57EAE522-F789-4188-B5A8-CAFEB0943774}"/>
+                <a16:creationId xmlns:a16="http://schemas.microsoft.com/office/drawing/2014/main" id="{1F20DEF8-6433-4571-AC85-9FFC3CC3D0C5}"/>
               </a:ext>
             </a:extLst>
           </p:cNvPr>
@@ -6325,7 +6325,7 @@
           <p:cNvPr id="17" name="">
             <a:extLst xmlns:a="http://schemas.openxmlformats.org/drawingml/2006/main">
               <a:ext uri="{FF2B5EF4-FFF2-40B4-BE49-F238E27FC236}">
-                <a16:creationId xmlns:a16="http://schemas.microsoft.com/office/drawing/2014/main" id="{07143160-2735-4A46-8D15-F388846B1FCD}"/>
+                <a16:creationId xmlns:a16="http://schemas.microsoft.com/office/drawing/2014/main" id="{6D6DB7FE-289D-44AD-922A-9126F16B2E8B}"/>
               </a:ext>
             </a:extLst>
           </p:cNvPr>
@@ -6382,7 +6382,7 @@
           <p:cNvPr id="18" name="">
             <a:extLst xmlns:a="http://schemas.openxmlformats.org/drawingml/2006/main">
               <a:ext uri="{FF2B5EF4-FFF2-40B4-BE49-F238E27FC236}">
-                <a16:creationId xmlns:a16="http://schemas.microsoft.com/office/drawing/2014/main" id="{62733A20-0502-4945-B532-CB24C99C5B97}"/>
+                <a16:creationId xmlns:a16="http://schemas.microsoft.com/office/drawing/2014/main" id="{387EAE8F-58C9-47FE-ABDC-E57316B8D1B0}"/>
               </a:ext>
             </a:extLst>
           </p:cNvPr>
@@ -6416,7 +6416,7 @@
           <p:cNvPr id="19" name="">
             <a:extLst xmlns:a="http://schemas.openxmlformats.org/drawingml/2006/main">
               <a:ext uri="{FF2B5EF4-FFF2-40B4-BE49-F238E27FC236}">
-                <a16:creationId xmlns:a16="http://schemas.microsoft.com/office/drawing/2014/main" id="{0A5FA684-4E28-4B93-BCD1-E4331314B9B1}"/>
+                <a16:creationId xmlns:a16="http://schemas.microsoft.com/office/drawing/2014/main" id="{820D89D7-B186-4165-9BDD-5CC8FA0422D9}"/>
               </a:ext>
             </a:extLst>
           </p:cNvPr>
@@ -6448,7 +6448,7 @@
           <p:cNvPr id="20" name="">
             <a:extLst xmlns:a="http://schemas.openxmlformats.org/drawingml/2006/main">
               <a:ext uri="{FF2B5EF4-FFF2-40B4-BE49-F238E27FC236}">
-                <a16:creationId xmlns:a16="http://schemas.microsoft.com/office/drawing/2014/main" id="{7020A4AB-68CA-4CD4-B87C-6C8B60970267}"/>
+                <a16:creationId xmlns:a16="http://schemas.microsoft.com/office/drawing/2014/main" id="{5769C8BA-0B8D-49A3-84CB-1FA1230766A5}"/>
               </a:ext>
             </a:extLst>
           </p:cNvPr>
@@ -6505,7 +6505,7 @@
           <p:cNvPr id="21" name="">
             <a:extLst xmlns:a="http://schemas.openxmlformats.org/drawingml/2006/main">
               <a:ext uri="{FF2B5EF4-FFF2-40B4-BE49-F238E27FC236}">
-                <a16:creationId xmlns:a16="http://schemas.microsoft.com/office/drawing/2014/main" id="{C23D7F81-AABD-4DC5-B871-2D362728E63A}"/>
+                <a16:creationId xmlns:a16="http://schemas.microsoft.com/office/drawing/2014/main" id="{3449BD81-1726-44BC-B662-A02D7706F7CB}"/>
               </a:ext>
             </a:extLst>
           </p:cNvPr>
@@ -6562,7 +6562,7 @@
           <p:cNvPr id="22" name="">
             <a:extLst xmlns:a="http://schemas.openxmlformats.org/drawingml/2006/main">
               <a:ext uri="{FF2B5EF4-FFF2-40B4-BE49-F238E27FC236}">
-                <a16:creationId xmlns:a16="http://schemas.microsoft.com/office/drawing/2014/main" id="{9D884879-0D74-443B-8D9F-A823ABA0AF0F}"/>
+                <a16:creationId xmlns:a16="http://schemas.microsoft.com/office/drawing/2014/main" id="{DD979C1C-429F-43AC-BBB5-34FE6CA1BE49}"/>
               </a:ext>
             </a:extLst>
           </p:cNvPr>
@@ -6617,7 +6617,7 @@
     </p:spTree>
     <p:extLst>
       <p:ext uri="{BB962C8B-B14F-4D97-AF65-F5344CB8AC3E}">
-        <p14:creationId xmlns:p14="http://schemas.microsoft.com/office/powerpoint/2010/main" val="1239249608"/>
+        <p14:creationId xmlns:p14="http://schemas.microsoft.com/office/powerpoint/2010/main" val="360803313"/>
       </p:ext>
     </p:extLst>
   </p:cSld>
@@ -6818,7 +6818,7 @@
           <p:cNvPr id="16" name="">
             <a:extLst xmlns:a="http://schemas.openxmlformats.org/drawingml/2006/main">
               <a:ext uri="{FF2B5EF4-FFF2-40B4-BE49-F238E27FC236}">
-                <a16:creationId xmlns:a16="http://schemas.microsoft.com/office/drawing/2014/main" id="{5FE40AFC-59D5-4661-BCD9-75E37D17867E}"/>
+                <a16:creationId xmlns:a16="http://schemas.microsoft.com/office/drawing/2014/main" id="{6829B697-CE81-444B-886A-C5E44941A5DC}"/>
               </a:ext>
             </a:extLst>
           </p:cNvPr>
@@ -6850,7 +6850,7 @@
           <p:cNvPr id="2" name="">
             <a:extLst xmlns:a="http://schemas.openxmlformats.org/drawingml/2006/main">
               <a:ext uri="{FF2B5EF4-FFF2-40B4-BE49-F238E27FC236}">
-                <a16:creationId xmlns:a16="http://schemas.microsoft.com/office/drawing/2014/main" id="{EF81B3E0-78F8-440C-85E2-071F93E3F6AD}"/>
+                <a16:creationId xmlns:a16="http://schemas.microsoft.com/office/drawing/2014/main" id="{CA57CB51-59A3-4FA6-9B3F-C130550CB610}"/>
               </a:ext>
             </a:extLst>
           </p:cNvPr>
@@ -6907,7 +6907,7 @@
           <p:cNvPr id="3" name="">
             <a:extLst xmlns:a="http://schemas.openxmlformats.org/drawingml/2006/main">
               <a:ext uri="{FF2B5EF4-FFF2-40B4-BE49-F238E27FC236}">
-                <a16:creationId xmlns:a16="http://schemas.microsoft.com/office/drawing/2014/main" id="{E9A9BB16-C513-4923-81F5-E349B65D9644}"/>
+                <a16:creationId xmlns:a16="http://schemas.microsoft.com/office/drawing/2014/main" id="{F3410C68-77AA-449E-9CDB-1909AD5D6759}"/>
               </a:ext>
             </a:extLst>
           </p:cNvPr>
@@ -6939,7 +6939,7 @@
           <p:cNvPr id="4" name="">
             <a:extLst xmlns:a="http://schemas.openxmlformats.org/drawingml/2006/main">
               <a:ext uri="{FF2B5EF4-FFF2-40B4-BE49-F238E27FC236}">
-                <a16:creationId xmlns:a16="http://schemas.microsoft.com/office/drawing/2014/main" id="{AF493E8F-827D-4D45-926A-FC2F509CFF23}"/>
+                <a16:creationId xmlns:a16="http://schemas.microsoft.com/office/drawing/2014/main" id="{A9D80670-0FD3-41A2-BD7C-FF7DC0B335B0}"/>
               </a:ext>
             </a:extLst>
           </p:cNvPr>
@@ -6996,7 +6996,7 @@
           <p:cNvPr id="5" name="">
             <a:extLst xmlns:a="http://schemas.openxmlformats.org/drawingml/2006/main">
               <a:ext uri="{FF2B5EF4-FFF2-40B4-BE49-F238E27FC236}">
-                <a16:creationId xmlns:a16="http://schemas.microsoft.com/office/drawing/2014/main" id="{E0A8783A-2CC0-460C-92F2-7E7564127CCA}"/>
+                <a16:creationId xmlns:a16="http://schemas.microsoft.com/office/drawing/2014/main" id="{A1811730-C6F4-4AFC-B541-ED004E7F247E}"/>
               </a:ext>
             </a:extLst>
           </p:cNvPr>
@@ -7053,7 +7053,7 @@
           <p:cNvPr id="6" name="">
             <a:extLst xmlns:a="http://schemas.openxmlformats.org/drawingml/2006/main">
               <a:ext uri="{FF2B5EF4-FFF2-40B4-BE49-F238E27FC236}">
-                <a16:creationId xmlns:a16="http://schemas.microsoft.com/office/drawing/2014/main" id="{98E2833B-AF62-457C-8CC4-16FB310BB5FB}"/>
+                <a16:creationId xmlns:a16="http://schemas.microsoft.com/office/drawing/2014/main" id="{988EBEC0-822C-4311-A60E-9D74EF4A93BF}"/>
               </a:ext>
             </a:extLst>
           </p:cNvPr>
@@ -7110,7 +7110,7 @@
           <p:cNvPr id="7" name="">
             <a:extLst xmlns:a="http://schemas.openxmlformats.org/drawingml/2006/main">
               <a:ext uri="{FF2B5EF4-FFF2-40B4-BE49-F238E27FC236}">
-                <a16:creationId xmlns:a16="http://schemas.microsoft.com/office/drawing/2014/main" id="{9D1238A6-3A93-44F5-A4CA-AD05254CF1F8}"/>
+                <a16:creationId xmlns:a16="http://schemas.microsoft.com/office/drawing/2014/main" id="{B2FA4580-6CD1-42F2-BEFD-8C81D2BF37BD}"/>
               </a:ext>
             </a:extLst>
           </p:cNvPr>
@@ -7142,7 +7142,7 @@
           <p:cNvPr id="8" name="">
             <a:extLst xmlns:a="http://schemas.openxmlformats.org/drawingml/2006/main">
               <a:ext uri="{FF2B5EF4-FFF2-40B4-BE49-F238E27FC236}">
-                <a16:creationId xmlns:a16="http://schemas.microsoft.com/office/drawing/2014/main" id="{FF96E0D3-A35D-4B67-82A9-39A8ED13ABA4}"/>
+                <a16:creationId xmlns:a16="http://schemas.microsoft.com/office/drawing/2014/main" id="{17D11816-5EF6-44DB-A4EC-A8FEACEB4FF3}"/>
               </a:ext>
             </a:extLst>
           </p:cNvPr>
@@ -7199,7 +7199,7 @@
           <p:cNvPr id="9" name="">
             <a:extLst xmlns:a="http://schemas.openxmlformats.org/drawingml/2006/main">
               <a:ext uri="{FF2B5EF4-FFF2-40B4-BE49-F238E27FC236}">
-                <a16:creationId xmlns:a16="http://schemas.microsoft.com/office/drawing/2014/main" id="{99939239-7A15-42F8-9AC6-2FF184FFDFAE}"/>
+                <a16:creationId xmlns:a16="http://schemas.microsoft.com/office/drawing/2014/main" id="{1E944869-3626-41C1-BA72-90A8AF0C5D5E}"/>
               </a:ext>
             </a:extLst>
           </p:cNvPr>
@@ -7256,7 +7256,7 @@
           <p:cNvPr id="10" name="">
             <a:extLst xmlns:a="http://schemas.openxmlformats.org/drawingml/2006/main">
               <a:ext uri="{FF2B5EF4-FFF2-40B4-BE49-F238E27FC236}">
-                <a16:creationId xmlns:a16="http://schemas.microsoft.com/office/drawing/2014/main" id="{0E87D1E4-6224-4487-B0C7-869FD43696F2}"/>
+                <a16:creationId xmlns:a16="http://schemas.microsoft.com/office/drawing/2014/main" id="{7987BDB2-6BDC-49AF-9EAA-B6DDFB19FAD7}"/>
               </a:ext>
             </a:extLst>
           </p:cNvPr>
@@ -7313,7 +7313,7 @@
           <p:cNvPr id="11" name="">
             <a:extLst xmlns:a="http://schemas.openxmlformats.org/drawingml/2006/main">
               <a:ext uri="{FF2B5EF4-FFF2-40B4-BE49-F238E27FC236}">
-                <a16:creationId xmlns:a16="http://schemas.microsoft.com/office/drawing/2014/main" id="{F3158F83-F0F9-4EFA-B587-04F8C4202422}"/>
+                <a16:creationId xmlns:a16="http://schemas.microsoft.com/office/drawing/2014/main" id="{FD976BDF-EB4F-4310-8D51-5835D748E728}"/>
               </a:ext>
             </a:extLst>
           </p:cNvPr>
@@ -7345,7 +7345,7 @@
           <p:cNvPr id="12" name="">
             <a:extLst xmlns:a="http://schemas.openxmlformats.org/drawingml/2006/main">
               <a:ext uri="{FF2B5EF4-FFF2-40B4-BE49-F238E27FC236}">
-                <a16:creationId xmlns:a16="http://schemas.microsoft.com/office/drawing/2014/main" id="{84949EC7-5804-4FFD-AC0E-54A3D150E41D}"/>
+                <a16:creationId xmlns:a16="http://schemas.microsoft.com/office/drawing/2014/main" id="{BD72719E-74C3-4AEC-B89E-B427B585B28B}"/>
               </a:ext>
             </a:extLst>
           </p:cNvPr>
@@ -7402,7 +7402,7 @@
           <p:cNvPr id="13" name="">
             <a:extLst xmlns:a="http://schemas.openxmlformats.org/drawingml/2006/main">
               <a:ext uri="{FF2B5EF4-FFF2-40B4-BE49-F238E27FC236}">
-                <a16:creationId xmlns:a16="http://schemas.microsoft.com/office/drawing/2014/main" id="{519F2AD3-04D2-48D4-8600-8BD0EE79733A}"/>
+                <a16:creationId xmlns:a16="http://schemas.microsoft.com/office/drawing/2014/main" id="{6C2CFBED-49BF-421E-B936-25CC9892C3EC}"/>
               </a:ext>
             </a:extLst>
           </p:cNvPr>
@@ -7459,7 +7459,7 @@
           <p:cNvPr id="14" name="">
             <a:extLst xmlns:a="http://schemas.openxmlformats.org/drawingml/2006/main">
               <a:ext uri="{FF2B5EF4-FFF2-40B4-BE49-F238E27FC236}">
-                <a16:creationId xmlns:a16="http://schemas.microsoft.com/office/drawing/2014/main" id="{17BCABAE-0579-44A3-8530-E221A36CC3CA}"/>
+                <a16:creationId xmlns:a16="http://schemas.microsoft.com/office/drawing/2014/main" id="{993AD7CF-F7D3-400D-B46C-7D4C24956971}"/>
               </a:ext>
             </a:extLst>
           </p:cNvPr>
@@ -7516,7 +7516,7 @@
           <p:cNvPr id="15" name="">
             <a:extLst xmlns:a="http://schemas.openxmlformats.org/drawingml/2006/main">
               <a:ext uri="{FF2B5EF4-FFF2-40B4-BE49-F238E27FC236}">
-                <a16:creationId xmlns:a16="http://schemas.microsoft.com/office/drawing/2014/main" id="{305F31A8-7404-4A3E-9FDB-4001112F3144}"/>
+                <a16:creationId xmlns:a16="http://schemas.microsoft.com/office/drawing/2014/main" id="{CB82B168-5F99-4AE9-8F83-02FB982DD1CF}"/>
               </a:ext>
             </a:extLst>
           </p:cNvPr>
@@ -7571,7 +7571,7 @@
     </p:spTree>
     <p:extLst>
       <p:ext uri="{BB962C8B-B14F-4D97-AF65-F5344CB8AC3E}">
-        <p14:creationId xmlns:p14="http://schemas.microsoft.com/office/powerpoint/2010/main" val="1697091836"/>
+        <p14:creationId xmlns:p14="http://schemas.microsoft.com/office/powerpoint/2010/main" val="48171361"/>
       </p:ext>
     </p:extLst>
   </p:cSld>
@@ -7772,7 +7772,7 @@
           <p:cNvPr id="23" name="">
             <a:extLst xmlns:a="http://schemas.openxmlformats.org/drawingml/2006/main">
               <a:ext uri="{FF2B5EF4-FFF2-40B4-BE49-F238E27FC236}">
-                <a16:creationId xmlns:a16="http://schemas.microsoft.com/office/drawing/2014/main" id="{9B55D701-5A44-4B88-8871-D49129713BC2}"/>
+                <a16:creationId xmlns:a16="http://schemas.microsoft.com/office/drawing/2014/main" id="{4C90C259-F73C-4D40-93B4-11D846570C42}"/>
               </a:ext>
             </a:extLst>
           </p:cNvPr>
@@ -7804,7 +7804,7 @@
           <p:cNvPr id="2" name="">
             <a:extLst xmlns:a="http://schemas.openxmlformats.org/drawingml/2006/main">
               <a:ext uri="{FF2B5EF4-FFF2-40B4-BE49-F238E27FC236}">
-                <a16:creationId xmlns:a16="http://schemas.microsoft.com/office/drawing/2014/main" id="{CBEA3267-C893-4C1C-BF08-1965EF4B4BA7}"/>
+                <a16:creationId xmlns:a16="http://schemas.microsoft.com/office/drawing/2014/main" id="{073DD59E-4CE5-4F9D-9786-B60B3FD7427D}"/>
               </a:ext>
             </a:extLst>
           </p:cNvPr>
@@ -7861,7 +7861,7 @@
           <p:cNvPr id="3" name="">
             <a:extLst xmlns:a="http://schemas.openxmlformats.org/drawingml/2006/main">
               <a:ext uri="{FF2B5EF4-FFF2-40B4-BE49-F238E27FC236}">
-                <a16:creationId xmlns:a16="http://schemas.microsoft.com/office/drawing/2014/main" id="{E4BC33BB-295E-4193-8D1C-5C4CAFDF5E78}"/>
+                <a16:creationId xmlns:a16="http://schemas.microsoft.com/office/drawing/2014/main" id="{DB374457-D806-4ECF-B585-432D785F1D51}"/>
               </a:ext>
             </a:extLst>
           </p:cNvPr>
@@ -7893,7 +7893,7 @@
           <p:cNvPr id="4" name="">
             <a:extLst xmlns:a="http://schemas.openxmlformats.org/drawingml/2006/main">
               <a:ext uri="{FF2B5EF4-FFF2-40B4-BE49-F238E27FC236}">
-                <a16:creationId xmlns:a16="http://schemas.microsoft.com/office/drawing/2014/main" id="{EFEB2D65-6EC3-473B-943E-FBF1E6B7F295}"/>
+                <a16:creationId xmlns:a16="http://schemas.microsoft.com/office/drawing/2014/main" id="{E7194311-37B7-4F98-B4F4-38E6D69338E5}"/>
               </a:ext>
             </a:extLst>
           </p:cNvPr>
@@ -7950,7 +7950,7 @@
           <p:cNvPr id="5" name="">
             <a:extLst xmlns:a="http://schemas.openxmlformats.org/drawingml/2006/main">
               <a:ext uri="{FF2B5EF4-FFF2-40B4-BE49-F238E27FC236}">
-                <a16:creationId xmlns:a16="http://schemas.microsoft.com/office/drawing/2014/main" id="{64A21F81-B838-4E16-B5C7-2D0364828333}"/>
+                <a16:creationId xmlns:a16="http://schemas.microsoft.com/office/drawing/2014/main" id="{884F9A64-98C6-48DA-928B-D9FC34CD4942}"/>
               </a:ext>
             </a:extLst>
           </p:cNvPr>
@@ -8007,7 +8007,7 @@
           <p:cNvPr id="6" name="">
             <a:extLst xmlns:a="http://schemas.openxmlformats.org/drawingml/2006/main">
               <a:ext uri="{FF2B5EF4-FFF2-40B4-BE49-F238E27FC236}">
-                <a16:creationId xmlns:a16="http://schemas.microsoft.com/office/drawing/2014/main" id="{B4F48DC6-D089-4433-9E10-BEDFDC0A3C1D}"/>
+                <a16:creationId xmlns:a16="http://schemas.microsoft.com/office/drawing/2014/main" id="{2A4847C9-E7E1-4F38-B7E8-B70972A739D8}"/>
               </a:ext>
             </a:extLst>
           </p:cNvPr>
@@ -8064,7 +8064,7 @@
           <p:cNvPr id="7" name="">
             <a:extLst xmlns:a="http://schemas.openxmlformats.org/drawingml/2006/main">
               <a:ext uri="{FF2B5EF4-FFF2-40B4-BE49-F238E27FC236}">
-                <a16:creationId xmlns:a16="http://schemas.microsoft.com/office/drawing/2014/main" id="{1E5CC21D-1252-4F85-B125-B8C2F223DC2C}"/>
+                <a16:creationId xmlns:a16="http://schemas.microsoft.com/office/drawing/2014/main" id="{A55AFD10-6B90-4BF1-9C19-6C91763641C4}"/>
               </a:ext>
             </a:extLst>
           </p:cNvPr>
@@ -8096,7 +8096,7 @@
           <p:cNvPr id="8" name="">
             <a:extLst xmlns:a="http://schemas.openxmlformats.org/drawingml/2006/main">
               <a:ext uri="{FF2B5EF4-FFF2-40B4-BE49-F238E27FC236}">
-                <a16:creationId xmlns:a16="http://schemas.microsoft.com/office/drawing/2014/main" id="{208872A8-23AF-43D0-A753-E165378D66E5}"/>
+                <a16:creationId xmlns:a16="http://schemas.microsoft.com/office/drawing/2014/main" id="{3DB54349-604D-47FB-9987-1FBCBC1336D0}"/>
               </a:ext>
             </a:extLst>
           </p:cNvPr>
@@ -8153,7 +8153,7 @@
           <p:cNvPr id="9" name="">
             <a:extLst xmlns:a="http://schemas.openxmlformats.org/drawingml/2006/main">
               <a:ext uri="{FF2B5EF4-FFF2-40B4-BE49-F238E27FC236}">
-                <a16:creationId xmlns:a16="http://schemas.microsoft.com/office/drawing/2014/main" id="{8023F79C-8BC1-46FE-A9CA-DDC8945032B2}"/>
+                <a16:creationId xmlns:a16="http://schemas.microsoft.com/office/drawing/2014/main" id="{CE241046-E2C6-40EA-919C-BC127C290839}"/>
               </a:ext>
             </a:extLst>
           </p:cNvPr>
@@ -8210,19 +8210,19 @@
           <p:cNvPr id="10" name="">
             <a:extLst xmlns:a="http://schemas.openxmlformats.org/drawingml/2006/main">
               <a:ext uri="{FF2B5EF4-FFF2-40B4-BE49-F238E27FC236}">
-                <a16:creationId xmlns:a16="http://schemas.microsoft.com/office/drawing/2014/main" id="{2A3AEF00-C357-4DB2-93B6-4EF0257A2C3D}"/>
-              </a:ext>
-            </a:extLst>
-          </p:cNvPr>
-          <p:cNvSpPr>
-            <a:spLocks xmlns:a="http://schemas.openxmlformats.org/drawingml/2006/main" noGrp="1"/>
-          </p:cNvSpPr>
-          <p:nvPr/>
-        </p:nvSpPr>
-        <p:spPr>
-          <a:xfrm xmlns:a="http://schemas.openxmlformats.org/drawingml/2006/main">
-            <a:off x="914400" y="1257300"/>
-            <a:ext cx="10363200" cy="781050"/>
+                <a16:creationId xmlns:a16="http://schemas.microsoft.com/office/drawing/2014/main" id="{E63DDCE3-31D8-4512-9E76-34D8022C4B5E}"/>
+              </a:ext>
+            </a:extLst>
+          </p:cNvPr>
+          <p:cNvSpPr>
+            <a:spLocks xmlns:a="http://schemas.openxmlformats.org/drawingml/2006/main" noGrp="1"/>
+          </p:cNvSpPr>
+          <p:nvPr/>
+        </p:nvSpPr>
+        <p:spPr>
+          <a:xfrm xmlns:a="http://schemas.openxmlformats.org/drawingml/2006/main">
+            <a:off x="857250" y="1219200"/>
+            <a:ext cx="10477500" cy="742950"/>
           </a:xfrm>
           <a:prstGeom xmlns:a="http://schemas.openxmlformats.org/drawingml/2006/main" prst="rect">
             <a:avLst/>
@@ -8239,7 +8239,7 @@
           <a:lstStyle xmlns:a="http://schemas.openxmlformats.org/drawingml/2006/main"/>
           <a:p xmlns:a="http://schemas.openxmlformats.org/drawingml/2006/main">
             <a:pPr algn="ctr">
-              <a:defRPr sz="2175" b="1">
+              <a:defRPr sz="2100" b="1">
                 <a:solidFill>
                   <a:srgbClr val="17253A"/>
                 </a:solidFill>
@@ -8249,7 +8249,7 @@
               </a:defRPr>
             </a:pPr>
             <a:r>
-              <a:rPr sz="2175" b="1">
+              <a:rPr sz="2100" b="1">
                 <a:solidFill>
                   <a:srgbClr val="17253A"/>
                 </a:solidFill>
@@ -8267,28 +8267,30 @@
           <p:cNvPr id="11" name="">
             <a:extLst xmlns:a="http://schemas.openxmlformats.org/drawingml/2006/main">
               <a:ext uri="{FF2B5EF4-FFF2-40B4-BE49-F238E27FC236}">
-                <a16:creationId xmlns:a16="http://schemas.microsoft.com/office/drawing/2014/main" id="{17192A00-895E-4D45-A28D-C0FF4FA6DBED}"/>
-              </a:ext>
-            </a:extLst>
-          </p:cNvPr>
-          <p:cNvSpPr>
-            <a:spLocks xmlns:a="http://schemas.openxmlformats.org/drawingml/2006/main" noGrp="1"/>
-          </p:cNvSpPr>
-          <p:nvPr/>
-        </p:nvSpPr>
-        <p:spPr>
-          <a:xfrm xmlns:a="http://schemas.openxmlformats.org/drawingml/2006/main">
-            <a:off x="1000125" y="2247900"/>
-            <a:ext cx="476250" cy="476250"/>
-          </a:xfrm>
-          <a:prstGeom xmlns:a="http://schemas.openxmlformats.org/drawingml/2006/main" prst="ellipse">
+                <a16:creationId xmlns:a16="http://schemas.microsoft.com/office/drawing/2014/main" id="{8C256930-3880-4BB8-B8A8-CF7BA0DF5DB6}"/>
+              </a:ext>
+            </a:extLst>
+          </p:cNvPr>
+          <p:cNvSpPr>
+            <a:spLocks xmlns:a="http://schemas.openxmlformats.org/drawingml/2006/main" noGrp="1"/>
+          </p:cNvSpPr>
+          <p:nvPr/>
+        </p:nvSpPr>
+        <p:spPr>
+          <a:xfrm xmlns:a="http://schemas.openxmlformats.org/drawingml/2006/main">
+            <a:off x="971550" y="2124075"/>
+            <a:ext cx="38100" cy="3524250"/>
+          </a:xfrm>
+          <a:prstGeom xmlns:a="http://schemas.openxmlformats.org/drawingml/2006/main" prst="rect">
             <a:avLst/>
           </a:prstGeom>
           <a:solidFill xmlns:a="http://schemas.openxmlformats.org/drawingml/2006/main">
-            <a:srgbClr val="18324A"/>
+            <a:srgbClr val="2C6E73"/>
           </a:solidFill>
           <a:ln xmlns:a="http://schemas.openxmlformats.org/drawingml/2006/main" w="0">
-            <a:noFill/>
+            <a:solidFill>
+              <a:srgbClr val="2C6E73"/>
+            </a:solidFill>
           </a:ln>
         </p:spPr>
       </p:sp>
@@ -8297,19 +8299,19 @@
           <p:cNvPr id="12" name="">
             <a:extLst xmlns:a="http://schemas.openxmlformats.org/drawingml/2006/main">
               <a:ext uri="{FF2B5EF4-FFF2-40B4-BE49-F238E27FC236}">
-                <a16:creationId xmlns:a16="http://schemas.microsoft.com/office/drawing/2014/main" id="{2084B84B-A077-480D-842D-152732DA2271}"/>
-              </a:ext>
-            </a:extLst>
-          </p:cNvPr>
-          <p:cNvSpPr>
-            <a:spLocks xmlns:a="http://schemas.openxmlformats.org/drawingml/2006/main" noGrp="1"/>
-          </p:cNvSpPr>
-          <p:nvPr/>
-        </p:nvSpPr>
-        <p:spPr>
-          <a:xfrm xmlns:a="http://schemas.openxmlformats.org/drawingml/2006/main">
-            <a:off x="1000125" y="2276475"/>
-            <a:ext cx="476250" cy="419100"/>
+                <a16:creationId xmlns:a16="http://schemas.microsoft.com/office/drawing/2014/main" id="{E63E4D7A-4974-46E2-9BE6-0F4298C32D9E}"/>
+              </a:ext>
+            </a:extLst>
+          </p:cNvPr>
+          <p:cNvSpPr>
+            <a:spLocks xmlns:a="http://schemas.openxmlformats.org/drawingml/2006/main" noGrp="1"/>
+          </p:cNvSpPr>
+          <p:nvPr/>
+        </p:nvSpPr>
+        <p:spPr>
+          <a:xfrm xmlns:a="http://schemas.openxmlformats.org/drawingml/2006/main">
+            <a:off x="1162050" y="2200275"/>
+            <a:ext cx="400050" cy="400050"/>
           </a:xfrm>
           <a:prstGeom xmlns:a="http://schemas.openxmlformats.org/drawingml/2006/main" prst="rect">
             <a:avLst/>
@@ -8326,9 +8328,9 @@
           <a:lstStyle xmlns:a="http://schemas.openxmlformats.org/drawingml/2006/main"/>
           <a:p xmlns:a="http://schemas.openxmlformats.org/drawingml/2006/main">
             <a:pPr algn="ctr">
-              <a:defRPr sz="1350" b="1">
-                <a:solidFill>
-                  <a:srgbClr val="FFFFFF"/>
+              <a:defRPr sz="1125" b="1">
+                <a:solidFill>
+                  <a:srgbClr val="2C6E73"/>
                 </a:solidFill>
                 <a:latin typeface="Arial"/>
                 <a:ea typeface="Arial"/>
@@ -8336,9 +8338,9 @@
               </a:defRPr>
             </a:pPr>
             <a:r>
-              <a:rPr sz="1350" b="1">
-                <a:solidFill>
-                  <a:srgbClr val="FFFFFF"/>
+              <a:rPr sz="1125" b="1">
+                <a:solidFill>
+                  <a:srgbClr val="2C6E73"/>
                 </a:solidFill>
                 <a:latin typeface="Arial"/>
                 <a:ea typeface="Arial"/>
@@ -8354,19 +8356,19 @@
           <p:cNvPr id="13" name="">
             <a:extLst xmlns:a="http://schemas.openxmlformats.org/drawingml/2006/main">
               <a:ext uri="{FF2B5EF4-FFF2-40B4-BE49-F238E27FC236}">
-                <a16:creationId xmlns:a16="http://schemas.microsoft.com/office/drawing/2014/main" id="{991B7A14-93AC-4F28-8EFB-EE7A01685C94}"/>
-              </a:ext>
-            </a:extLst>
-          </p:cNvPr>
-          <p:cNvSpPr>
-            <a:spLocks xmlns:a="http://schemas.openxmlformats.org/drawingml/2006/main" noGrp="1"/>
-          </p:cNvSpPr>
-          <p:nvPr/>
-        </p:nvSpPr>
-        <p:spPr>
-          <a:xfrm xmlns:a="http://schemas.openxmlformats.org/drawingml/2006/main">
-            <a:off x="1714500" y="2181225"/>
-            <a:ext cx="9429750" cy="609600"/>
+                <a16:creationId xmlns:a16="http://schemas.microsoft.com/office/drawing/2014/main" id="{AFE39FB2-F069-4DCC-A17A-FE2807089E8D}"/>
+              </a:ext>
+            </a:extLst>
+          </p:cNvPr>
+          <p:cNvSpPr>
+            <a:spLocks xmlns:a="http://schemas.openxmlformats.org/drawingml/2006/main" noGrp="1"/>
+          </p:cNvSpPr>
+          <p:nvPr/>
+        </p:nvSpPr>
+        <p:spPr>
+          <a:xfrm xmlns:a="http://schemas.openxmlformats.org/drawingml/2006/main">
+            <a:off x="1714500" y="2114550"/>
+            <a:ext cx="9525000" cy="809625"/>
           </a:xfrm>
           <a:prstGeom xmlns:a="http://schemas.openxmlformats.org/drawingml/2006/main" prst="rect">
             <a:avLst/>
@@ -8383,7 +8385,7 @@
           <a:lstStyle xmlns:a="http://schemas.openxmlformats.org/drawingml/2006/main"/>
           <a:p xmlns:a="http://schemas.openxmlformats.org/drawingml/2006/main">
             <a:pPr algn="l">
-              <a:defRPr sz="1500" b="0">
+              <a:defRPr sz="1725" b="0">
                 <a:solidFill>
                   <a:srgbClr val="17253A"/>
                 </a:solidFill>
@@ -8393,7 +8395,7 @@
               </a:defRPr>
             </a:pPr>
             <a:r>
-              <a:rPr sz="1500" b="0">
+              <a:rPr sz="1725" b="0">
                 <a:solidFill>
                   <a:srgbClr val="17253A"/>
                 </a:solidFill>
@@ -8401,7 +8403,7 @@
                 <a:ea typeface="Arial"/>
                 <a:cs typeface="Arial"/>
               </a:rPr>
-              <a:t>Identify the structure: Identify which quantities the ratio compares and keep their order.</a:t>
+              <a:t>5 : 2</a:t>
             </a:r>
           </a:p>
         </p:txBody>
@@ -8411,28 +8413,30 @@
           <p:cNvPr id="14" name="">
             <a:extLst xmlns:a="http://schemas.openxmlformats.org/drawingml/2006/main">
               <a:ext uri="{FF2B5EF4-FFF2-40B4-BE49-F238E27FC236}">
-                <a16:creationId xmlns:a16="http://schemas.microsoft.com/office/drawing/2014/main" id="{BA383185-2819-4E40-ADC3-273F01E900DF}"/>
-              </a:ext>
-            </a:extLst>
-          </p:cNvPr>
-          <p:cNvSpPr>
-            <a:spLocks xmlns:a="http://schemas.openxmlformats.org/drawingml/2006/main" noGrp="1"/>
-          </p:cNvSpPr>
-          <p:nvPr/>
-        </p:nvSpPr>
-        <p:spPr>
-          <a:xfrm xmlns:a="http://schemas.openxmlformats.org/drawingml/2006/main">
-            <a:off x="1000125" y="2990850"/>
-            <a:ext cx="476250" cy="476250"/>
-          </a:xfrm>
-          <a:prstGeom xmlns:a="http://schemas.openxmlformats.org/drawingml/2006/main" prst="ellipse">
+                <a16:creationId xmlns:a16="http://schemas.microsoft.com/office/drawing/2014/main" id="{B71C054D-BB21-4075-86CB-908967745B7A}"/>
+              </a:ext>
+            </a:extLst>
+          </p:cNvPr>
+          <p:cNvSpPr>
+            <a:spLocks xmlns:a="http://schemas.openxmlformats.org/drawingml/2006/main" noGrp="1"/>
+          </p:cNvSpPr>
+          <p:nvPr/>
+        </p:nvSpPr>
+        <p:spPr>
+          <a:xfrm xmlns:a="http://schemas.openxmlformats.org/drawingml/2006/main">
+            <a:off x="1714500" y="2943225"/>
+            <a:ext cx="9334500" cy="9525"/>
+          </a:xfrm>
+          <a:prstGeom xmlns:a="http://schemas.openxmlformats.org/drawingml/2006/main" prst="rect">
             <a:avLst/>
           </a:prstGeom>
           <a:solidFill xmlns:a="http://schemas.openxmlformats.org/drawingml/2006/main">
-            <a:srgbClr val="2C6E73"/>
+            <a:srgbClr val="D9E0E6"/>
           </a:solidFill>
           <a:ln xmlns:a="http://schemas.openxmlformats.org/drawingml/2006/main" w="0">
-            <a:noFill/>
+            <a:solidFill>
+              <a:srgbClr val="D9E0E6"/>
+            </a:solidFill>
           </a:ln>
         </p:spPr>
       </p:sp>
@@ -8441,19 +8445,19 @@
           <p:cNvPr id="15" name="">
             <a:extLst xmlns:a="http://schemas.openxmlformats.org/drawingml/2006/main">
               <a:ext uri="{FF2B5EF4-FFF2-40B4-BE49-F238E27FC236}">
-                <a16:creationId xmlns:a16="http://schemas.microsoft.com/office/drawing/2014/main" id="{2863EB67-7DC7-41C7-B336-664CB50D3E23}"/>
-              </a:ext>
-            </a:extLst>
-          </p:cNvPr>
-          <p:cNvSpPr>
-            <a:spLocks xmlns:a="http://schemas.openxmlformats.org/drawingml/2006/main" noGrp="1"/>
-          </p:cNvSpPr>
-          <p:nvPr/>
-        </p:nvSpPr>
-        <p:spPr>
-          <a:xfrm xmlns:a="http://schemas.openxmlformats.org/drawingml/2006/main">
-            <a:off x="1000125" y="3019425"/>
-            <a:ext cx="476250" cy="419100"/>
+                <a16:creationId xmlns:a16="http://schemas.microsoft.com/office/drawing/2014/main" id="{0C799331-8175-43AE-BFE1-49EDC3073570}"/>
+              </a:ext>
+            </a:extLst>
+          </p:cNvPr>
+          <p:cNvSpPr>
+            <a:spLocks xmlns:a="http://schemas.openxmlformats.org/drawingml/2006/main" noGrp="1"/>
+          </p:cNvSpPr>
+          <p:nvPr/>
+        </p:nvSpPr>
+        <p:spPr>
+          <a:xfrm xmlns:a="http://schemas.openxmlformats.org/drawingml/2006/main">
+            <a:off x="1162050" y="3076575"/>
+            <a:ext cx="400050" cy="400050"/>
           </a:xfrm>
           <a:prstGeom xmlns:a="http://schemas.openxmlformats.org/drawingml/2006/main" prst="rect">
             <a:avLst/>
@@ -8470,9 +8474,9 @@
           <a:lstStyle xmlns:a="http://schemas.openxmlformats.org/drawingml/2006/main"/>
           <a:p xmlns:a="http://schemas.openxmlformats.org/drawingml/2006/main">
             <a:pPr algn="ctr">
-              <a:defRPr sz="1350" b="1">
-                <a:solidFill>
-                  <a:srgbClr val="FFFFFF"/>
+              <a:defRPr sz="1125" b="1">
+                <a:solidFill>
+                  <a:srgbClr val="2C6E73"/>
                 </a:solidFill>
                 <a:latin typeface="Arial"/>
                 <a:ea typeface="Arial"/>
@@ -8480,9 +8484,9 @@
               </a:defRPr>
             </a:pPr>
             <a:r>
-              <a:rPr sz="1350" b="1">
-                <a:solidFill>
-                  <a:srgbClr val="FFFFFF"/>
+              <a:rPr sz="1125" b="1">
+                <a:solidFill>
+                  <a:srgbClr val="2C6E73"/>
                 </a:solidFill>
                 <a:latin typeface="Arial"/>
                 <a:ea typeface="Arial"/>
@@ -8498,19 +8502,19 @@
           <p:cNvPr id="16" name="">
             <a:extLst xmlns:a="http://schemas.openxmlformats.org/drawingml/2006/main">
               <a:ext uri="{FF2B5EF4-FFF2-40B4-BE49-F238E27FC236}">
-                <a16:creationId xmlns:a16="http://schemas.microsoft.com/office/drawing/2014/main" id="{C1DFE0FF-2133-45CE-80AC-FBA4BEC305BF}"/>
-              </a:ext>
-            </a:extLst>
-          </p:cNvPr>
-          <p:cNvSpPr>
-            <a:spLocks xmlns:a="http://schemas.openxmlformats.org/drawingml/2006/main" noGrp="1"/>
-          </p:cNvSpPr>
-          <p:nvPr/>
-        </p:nvSpPr>
-        <p:spPr>
-          <a:xfrm xmlns:a="http://schemas.openxmlformats.org/drawingml/2006/main">
-            <a:off x="1714500" y="2924175"/>
-            <a:ext cx="9429750" cy="609600"/>
+                <a16:creationId xmlns:a16="http://schemas.microsoft.com/office/drawing/2014/main" id="{03088F62-59A4-4A50-934B-94F47E5EAD8A}"/>
+              </a:ext>
+            </a:extLst>
+          </p:cNvPr>
+          <p:cNvSpPr>
+            <a:spLocks xmlns:a="http://schemas.openxmlformats.org/drawingml/2006/main" noGrp="1"/>
+          </p:cNvSpPr>
+          <p:nvPr/>
+        </p:nvSpPr>
+        <p:spPr>
+          <a:xfrm xmlns:a="http://schemas.openxmlformats.org/drawingml/2006/main">
+            <a:off x="1714500" y="2990850"/>
+            <a:ext cx="9525000" cy="809625"/>
           </a:xfrm>
           <a:prstGeom xmlns:a="http://schemas.openxmlformats.org/drawingml/2006/main" prst="rect">
             <a:avLst/>
@@ -8527,7 +8531,7 @@
           <a:lstStyle xmlns:a="http://schemas.openxmlformats.org/drawingml/2006/main"/>
           <a:p xmlns:a="http://schemas.openxmlformats.org/drawingml/2006/main">
             <a:pPr algn="l">
-              <a:defRPr sz="1500" b="0">
+              <a:defRPr sz="1725" b="0">
                 <a:solidFill>
                   <a:srgbClr val="17253A"/>
                 </a:solidFill>
@@ -8537,7 +8541,7 @@
               </a:defRPr>
             </a:pPr>
             <a:r>
-              <a:rPr sz="1500" b="0">
+              <a:rPr sz="1725" b="0">
                 <a:solidFill>
                   <a:srgbClr val="17253A"/>
                 </a:solidFill>
@@ -8545,7 +8549,7 @@
                 <a:ea typeface="Arial"/>
                 <a:cs typeface="Arial"/>
               </a:rPr>
-              <a:t>Set up the method: Scale both parts by the same factor.</a:t>
+              <a:t>Keep the quantities in the stated order</a:t>
             </a:r>
           </a:p>
         </p:txBody>
@@ -8555,28 +8559,30 @@
           <p:cNvPr id="17" name="">
             <a:extLst xmlns:a="http://schemas.openxmlformats.org/drawingml/2006/main">
               <a:ext uri="{FF2B5EF4-FFF2-40B4-BE49-F238E27FC236}">
-                <a16:creationId xmlns:a16="http://schemas.microsoft.com/office/drawing/2014/main" id="{5FFE1DCE-81ED-44BD-B618-3BB3B4F3EF06}"/>
-              </a:ext>
-            </a:extLst>
-          </p:cNvPr>
-          <p:cNvSpPr>
-            <a:spLocks xmlns:a="http://schemas.openxmlformats.org/drawingml/2006/main" noGrp="1"/>
-          </p:cNvSpPr>
-          <p:nvPr/>
-        </p:nvSpPr>
-        <p:spPr>
-          <a:xfrm xmlns:a="http://schemas.openxmlformats.org/drawingml/2006/main">
-            <a:off x="1000125" y="3733800"/>
-            <a:ext cx="476250" cy="476250"/>
-          </a:xfrm>
-          <a:prstGeom xmlns:a="http://schemas.openxmlformats.org/drawingml/2006/main" prst="ellipse">
+                <a16:creationId xmlns:a16="http://schemas.microsoft.com/office/drawing/2014/main" id="{2ECBE379-8675-4280-9857-B3C3C925A3D3}"/>
+              </a:ext>
+            </a:extLst>
+          </p:cNvPr>
+          <p:cNvSpPr>
+            <a:spLocks xmlns:a="http://schemas.openxmlformats.org/drawingml/2006/main" noGrp="1"/>
+          </p:cNvSpPr>
+          <p:nvPr/>
+        </p:nvSpPr>
+        <p:spPr>
+          <a:xfrm xmlns:a="http://schemas.openxmlformats.org/drawingml/2006/main">
+            <a:off x="1714500" y="3819525"/>
+            <a:ext cx="9334500" cy="9525"/>
+          </a:xfrm>
+          <a:prstGeom xmlns:a="http://schemas.openxmlformats.org/drawingml/2006/main" prst="rect">
             <a:avLst/>
           </a:prstGeom>
           <a:solidFill xmlns:a="http://schemas.openxmlformats.org/drawingml/2006/main">
-            <a:srgbClr val="2C6E73"/>
+            <a:srgbClr val="D9E0E6"/>
           </a:solidFill>
           <a:ln xmlns:a="http://schemas.openxmlformats.org/drawingml/2006/main" w="0">
-            <a:noFill/>
+            <a:solidFill>
+              <a:srgbClr val="D9E0E6"/>
+            </a:solidFill>
           </a:ln>
         </p:spPr>
       </p:sp>
@@ -8585,19 +8591,19 @@
           <p:cNvPr id="18" name="">
             <a:extLst xmlns:a="http://schemas.openxmlformats.org/drawingml/2006/main">
               <a:ext uri="{FF2B5EF4-FFF2-40B4-BE49-F238E27FC236}">
-                <a16:creationId xmlns:a16="http://schemas.microsoft.com/office/drawing/2014/main" id="{162464E1-C6E7-4962-A369-9FD234ED7660}"/>
-              </a:ext>
-            </a:extLst>
-          </p:cNvPr>
-          <p:cNvSpPr>
-            <a:spLocks xmlns:a="http://schemas.openxmlformats.org/drawingml/2006/main" noGrp="1"/>
-          </p:cNvSpPr>
-          <p:nvPr/>
-        </p:nvSpPr>
-        <p:spPr>
-          <a:xfrm xmlns:a="http://schemas.openxmlformats.org/drawingml/2006/main">
-            <a:off x="1000125" y="3762375"/>
-            <a:ext cx="476250" cy="419100"/>
+                <a16:creationId xmlns:a16="http://schemas.microsoft.com/office/drawing/2014/main" id="{A741D53C-A28C-48E2-A780-CA8949EC030D}"/>
+              </a:ext>
+            </a:extLst>
+          </p:cNvPr>
+          <p:cNvSpPr>
+            <a:spLocks xmlns:a="http://schemas.openxmlformats.org/drawingml/2006/main" noGrp="1"/>
+          </p:cNvSpPr>
+          <p:nvPr/>
+        </p:nvSpPr>
+        <p:spPr>
+          <a:xfrm xmlns:a="http://schemas.openxmlformats.org/drawingml/2006/main">
+            <a:off x="1162050" y="3952875"/>
+            <a:ext cx="400050" cy="400050"/>
           </a:xfrm>
           <a:prstGeom xmlns:a="http://schemas.openxmlformats.org/drawingml/2006/main" prst="rect">
             <a:avLst/>
@@ -8614,9 +8620,9 @@
           <a:lstStyle xmlns:a="http://schemas.openxmlformats.org/drawingml/2006/main"/>
           <a:p xmlns:a="http://schemas.openxmlformats.org/drawingml/2006/main">
             <a:pPr algn="ctr">
-              <a:defRPr sz="1350" b="1">
-                <a:solidFill>
-                  <a:srgbClr val="FFFFFF"/>
+              <a:defRPr sz="1125" b="1">
+                <a:solidFill>
+                  <a:srgbClr val="2C6E73"/>
                 </a:solidFill>
                 <a:latin typeface="Arial"/>
                 <a:ea typeface="Arial"/>
@@ -8624,9 +8630,9 @@
               </a:defRPr>
             </a:pPr>
             <a:r>
-              <a:rPr sz="1350" b="1">
-                <a:solidFill>
-                  <a:srgbClr val="FFFFFF"/>
+              <a:rPr sz="1125" b="1">
+                <a:solidFill>
+                  <a:srgbClr val="2C6E73"/>
                 </a:solidFill>
                 <a:latin typeface="Arial"/>
                 <a:ea typeface="Arial"/>
@@ -8642,19 +8648,19 @@
           <p:cNvPr id="19" name="">
             <a:extLst xmlns:a="http://schemas.openxmlformats.org/drawingml/2006/main">
               <a:ext uri="{FF2B5EF4-FFF2-40B4-BE49-F238E27FC236}">
-                <a16:creationId xmlns:a16="http://schemas.microsoft.com/office/drawing/2014/main" id="{8BF41AA2-B7AE-4E4B-A582-DA341FC13C93}"/>
-              </a:ext>
-            </a:extLst>
-          </p:cNvPr>
-          <p:cNvSpPr>
-            <a:spLocks xmlns:a="http://schemas.openxmlformats.org/drawingml/2006/main" noGrp="1"/>
-          </p:cNvSpPr>
-          <p:nvPr/>
-        </p:nvSpPr>
-        <p:spPr>
-          <a:xfrm xmlns:a="http://schemas.openxmlformats.org/drawingml/2006/main">
-            <a:off x="1714500" y="3667125"/>
-            <a:ext cx="9429750" cy="609600"/>
+                <a16:creationId xmlns:a16="http://schemas.microsoft.com/office/drawing/2014/main" id="{49FD843E-4EB6-4399-9C8A-CCCA3A489A0F}"/>
+              </a:ext>
+            </a:extLst>
+          </p:cNvPr>
+          <p:cNvSpPr>
+            <a:spLocks xmlns:a="http://schemas.openxmlformats.org/drawingml/2006/main" noGrp="1"/>
+          </p:cNvSpPr>
+          <p:nvPr/>
+        </p:nvSpPr>
+        <p:spPr>
+          <a:xfrm xmlns:a="http://schemas.openxmlformats.org/drawingml/2006/main">
+            <a:off x="1714500" y="3867150"/>
+            <a:ext cx="9525000" cy="809625"/>
           </a:xfrm>
           <a:prstGeom xmlns:a="http://schemas.openxmlformats.org/drawingml/2006/main" prst="rect">
             <a:avLst/>
@@ -8671,7 +8677,7 @@
           <a:lstStyle xmlns:a="http://schemas.openxmlformats.org/drawingml/2006/main"/>
           <a:p xmlns:a="http://schemas.openxmlformats.org/drawingml/2006/main">
             <a:pPr algn="l">
-              <a:defRPr sz="1500" b="0">
+              <a:defRPr sz="1725" b="0">
                 <a:solidFill>
                   <a:srgbClr val="17253A"/>
                 </a:solidFill>
@@ -8681,7 +8687,7 @@
               </a:defRPr>
             </a:pPr>
             <a:r>
-              <a:rPr sz="1500" b="0">
+              <a:rPr sz="1725" b="0">
                 <a:solidFill>
                   <a:srgbClr val="17253A"/>
                 </a:solidFill>
@@ -8689,7 +8695,7 @@
                 <a:ea typeface="Arial"/>
                 <a:cs typeface="Arial"/>
               </a:rPr>
-              <a:t>Complete the calculation: For every 5 of the first quantity, there are 2 of the second.</a:t>
+              <a:t>For every 5 of the first quantity</a:t>
             </a:r>
           </a:p>
         </p:txBody>
@@ -8699,28 +8705,30 @@
           <p:cNvPr id="20" name="">
             <a:extLst xmlns:a="http://schemas.openxmlformats.org/drawingml/2006/main">
               <a:ext uri="{FF2B5EF4-FFF2-40B4-BE49-F238E27FC236}">
-                <a16:creationId xmlns:a16="http://schemas.microsoft.com/office/drawing/2014/main" id="{FEEBB30A-BAD3-410A-A415-24EE7D0649E6}"/>
-              </a:ext>
-            </a:extLst>
-          </p:cNvPr>
-          <p:cNvSpPr>
-            <a:spLocks xmlns:a="http://schemas.openxmlformats.org/drawingml/2006/main" noGrp="1"/>
-          </p:cNvSpPr>
-          <p:nvPr/>
-        </p:nvSpPr>
-        <p:spPr>
-          <a:xfrm xmlns:a="http://schemas.openxmlformats.org/drawingml/2006/main">
-            <a:off x="1000125" y="4476750"/>
-            <a:ext cx="476250" cy="476250"/>
-          </a:xfrm>
-          <a:prstGeom xmlns:a="http://schemas.openxmlformats.org/drawingml/2006/main" prst="ellipse">
+                <a16:creationId xmlns:a16="http://schemas.microsoft.com/office/drawing/2014/main" id="{FF5F2A02-1BEF-4DA1-B635-D79A5A160255}"/>
+              </a:ext>
+            </a:extLst>
+          </p:cNvPr>
+          <p:cNvSpPr>
+            <a:spLocks xmlns:a="http://schemas.openxmlformats.org/drawingml/2006/main" noGrp="1"/>
+          </p:cNvSpPr>
+          <p:nvPr/>
+        </p:nvSpPr>
+        <p:spPr>
+          <a:xfrm xmlns:a="http://schemas.openxmlformats.org/drawingml/2006/main">
+            <a:off x="1714500" y="4695825"/>
+            <a:ext cx="9334500" cy="9525"/>
+          </a:xfrm>
+          <a:prstGeom xmlns:a="http://schemas.openxmlformats.org/drawingml/2006/main" prst="rect">
             <a:avLst/>
           </a:prstGeom>
           <a:solidFill xmlns:a="http://schemas.openxmlformats.org/drawingml/2006/main">
-            <a:srgbClr val="2C6E73"/>
+            <a:srgbClr val="D9E0E6"/>
           </a:solidFill>
           <a:ln xmlns:a="http://schemas.openxmlformats.org/drawingml/2006/main" w="0">
-            <a:noFill/>
+            <a:solidFill>
+              <a:srgbClr val="D9E0E6"/>
+            </a:solidFill>
           </a:ln>
         </p:spPr>
       </p:sp>
@@ -8729,19 +8737,19 @@
           <p:cNvPr id="21" name="">
             <a:extLst xmlns:a="http://schemas.openxmlformats.org/drawingml/2006/main">
               <a:ext uri="{FF2B5EF4-FFF2-40B4-BE49-F238E27FC236}">
-                <a16:creationId xmlns:a16="http://schemas.microsoft.com/office/drawing/2014/main" id="{F7539AB9-146F-4E3A-97BF-EF6993206473}"/>
-              </a:ext>
-            </a:extLst>
-          </p:cNvPr>
-          <p:cNvSpPr>
-            <a:spLocks xmlns:a="http://schemas.openxmlformats.org/drawingml/2006/main" noGrp="1"/>
-          </p:cNvSpPr>
-          <p:nvPr/>
-        </p:nvSpPr>
-        <p:spPr>
-          <a:xfrm xmlns:a="http://schemas.openxmlformats.org/drawingml/2006/main">
-            <a:off x="1000125" y="4505325"/>
-            <a:ext cx="476250" cy="419100"/>
+                <a16:creationId xmlns:a16="http://schemas.microsoft.com/office/drawing/2014/main" id="{BCFA65CE-458E-4CCB-862C-E2D6A8FF96E8}"/>
+              </a:ext>
+            </a:extLst>
+          </p:cNvPr>
+          <p:cNvSpPr>
+            <a:spLocks xmlns:a="http://schemas.openxmlformats.org/drawingml/2006/main" noGrp="1"/>
+          </p:cNvSpPr>
+          <p:nvPr/>
+        </p:nvSpPr>
+        <p:spPr>
+          <a:xfrm xmlns:a="http://schemas.openxmlformats.org/drawingml/2006/main">
+            <a:off x="1162050" y="4829175"/>
+            <a:ext cx="400050" cy="400050"/>
           </a:xfrm>
           <a:prstGeom xmlns:a="http://schemas.openxmlformats.org/drawingml/2006/main" prst="rect">
             <a:avLst/>
@@ -8758,9 +8766,9 @@
           <a:lstStyle xmlns:a="http://schemas.openxmlformats.org/drawingml/2006/main"/>
           <a:p xmlns:a="http://schemas.openxmlformats.org/drawingml/2006/main">
             <a:pPr algn="ctr">
-              <a:defRPr sz="1350" b="1">
-                <a:solidFill>
-                  <a:srgbClr val="FFFFFF"/>
+              <a:defRPr sz="1125" b="1">
+                <a:solidFill>
+                  <a:srgbClr val="2F785D"/>
                 </a:solidFill>
                 <a:latin typeface="Arial"/>
                 <a:ea typeface="Arial"/>
@@ -8768,9 +8776,9 @@
               </a:defRPr>
             </a:pPr>
             <a:r>
-              <a:rPr sz="1350" b="1">
-                <a:solidFill>
-                  <a:srgbClr val="FFFFFF"/>
+              <a:rPr sz="1125" b="1">
+                <a:solidFill>
+                  <a:srgbClr val="2F785D"/>
                 </a:solidFill>
                 <a:latin typeface="Arial"/>
                 <a:ea typeface="Arial"/>
@@ -8786,19 +8794,19 @@
           <p:cNvPr id="22" name="">
             <a:extLst xmlns:a="http://schemas.openxmlformats.org/drawingml/2006/main">
               <a:ext uri="{FF2B5EF4-FFF2-40B4-BE49-F238E27FC236}">
-                <a16:creationId xmlns:a16="http://schemas.microsoft.com/office/drawing/2014/main" id="{AB47D057-575E-407C-BE4D-03BB4B211E1E}"/>
-              </a:ext>
-            </a:extLst>
-          </p:cNvPr>
-          <p:cNvSpPr>
-            <a:spLocks xmlns:a="http://schemas.openxmlformats.org/drawingml/2006/main" noGrp="1"/>
-          </p:cNvSpPr>
-          <p:nvPr/>
-        </p:nvSpPr>
-        <p:spPr>
-          <a:xfrm xmlns:a="http://schemas.openxmlformats.org/drawingml/2006/main">
-            <a:off x="1714500" y="4410075"/>
-            <a:ext cx="9429750" cy="609600"/>
+                <a16:creationId xmlns:a16="http://schemas.microsoft.com/office/drawing/2014/main" id="{CE14FA48-7308-4B8D-BCFC-017385E6984B}"/>
+              </a:ext>
+            </a:extLst>
+          </p:cNvPr>
+          <p:cNvSpPr>
+            <a:spLocks xmlns:a="http://schemas.openxmlformats.org/drawingml/2006/main" noGrp="1"/>
+          </p:cNvSpPr>
+          <p:nvPr/>
+        </p:nvSpPr>
+        <p:spPr>
+          <a:xfrm xmlns:a="http://schemas.openxmlformats.org/drawingml/2006/main">
+            <a:off x="1714500" y="4743450"/>
+            <a:ext cx="9525000" cy="809625"/>
           </a:xfrm>
           <a:prstGeom xmlns:a="http://schemas.openxmlformats.org/drawingml/2006/main" prst="rect">
             <a:avLst/>
@@ -8815,7 +8823,7 @@
           <a:lstStyle xmlns:a="http://schemas.openxmlformats.org/drawingml/2006/main"/>
           <a:p xmlns:a="http://schemas.openxmlformats.org/drawingml/2006/main">
             <a:pPr algn="l">
-              <a:defRPr sz="1500" b="1">
+              <a:defRPr sz="1725" b="1">
                 <a:solidFill>
                   <a:srgbClr val="2F785D"/>
                 </a:solidFill>
@@ -8825,7 +8833,7 @@
               </a:defRPr>
             </a:pPr>
             <a:r>
-              <a:rPr sz="1500" b="1">
+              <a:rPr sz="1725" b="1">
                 <a:solidFill>
                   <a:srgbClr val="2F785D"/>
                 </a:solidFill>
@@ -8833,7 +8841,7 @@
                 <a:ea typeface="Arial"/>
                 <a:cs typeface="Arial"/>
               </a:rPr>
-              <a:t>Check the result: Check the relationship using a table, bar or sentence.</a:t>
+              <a:t>there are 2 of the second</a:t>
             </a:r>
           </a:p>
         </p:txBody>
@@ -8841,7 +8849,7 @@
     </p:spTree>
     <p:extLst>
       <p:ext uri="{BB962C8B-B14F-4D97-AF65-F5344CB8AC3E}">
-        <p14:creationId xmlns:p14="http://schemas.microsoft.com/office/powerpoint/2010/main" val="1773560713"/>
+        <p14:creationId xmlns:p14="http://schemas.microsoft.com/office/powerpoint/2010/main" val="209366838"/>
       </p:ext>
     </p:extLst>
   </p:cSld>
@@ -9134,7 +9142,7 @@
           <p:cNvPr id="15" name="">
             <a:extLst xmlns:a="http://schemas.openxmlformats.org/drawingml/2006/main">
               <a:ext uri="{FF2B5EF4-FFF2-40B4-BE49-F238E27FC236}">
-                <a16:creationId xmlns:a16="http://schemas.microsoft.com/office/drawing/2014/main" id="{710D9135-2ACD-4369-8507-16F2D4B286CD}"/>
+                <a16:creationId xmlns:a16="http://schemas.microsoft.com/office/drawing/2014/main" id="{7A7C55C5-64F5-4527-847B-EFA4ADEF274D}"/>
               </a:ext>
             </a:extLst>
           </p:cNvPr>
@@ -9166,7 +9174,7 @@
           <p:cNvPr id="2" name="">
             <a:extLst xmlns:a="http://schemas.openxmlformats.org/drawingml/2006/main">
               <a:ext uri="{FF2B5EF4-FFF2-40B4-BE49-F238E27FC236}">
-                <a16:creationId xmlns:a16="http://schemas.microsoft.com/office/drawing/2014/main" id="{7FEB033D-B793-4F97-9A1A-622A91E26076}"/>
+                <a16:creationId xmlns:a16="http://schemas.microsoft.com/office/drawing/2014/main" id="{6E7A11A6-334B-4FB4-A55E-103201C92176}"/>
               </a:ext>
             </a:extLst>
           </p:cNvPr>
@@ -9223,7 +9231,7 @@
           <p:cNvPr id="3" name="">
             <a:extLst xmlns:a="http://schemas.openxmlformats.org/drawingml/2006/main">
               <a:ext uri="{FF2B5EF4-FFF2-40B4-BE49-F238E27FC236}">
-                <a16:creationId xmlns:a16="http://schemas.microsoft.com/office/drawing/2014/main" id="{1E457EB6-2F3D-4A34-BCB6-16659C2B1B5B}"/>
+                <a16:creationId xmlns:a16="http://schemas.microsoft.com/office/drawing/2014/main" id="{B611D0FE-914F-48E9-85F3-F29EC056A8F8}"/>
               </a:ext>
             </a:extLst>
           </p:cNvPr>
@@ -9255,7 +9263,7 @@
           <p:cNvPr id="4" name="">
             <a:extLst xmlns:a="http://schemas.openxmlformats.org/drawingml/2006/main">
               <a:ext uri="{FF2B5EF4-FFF2-40B4-BE49-F238E27FC236}">
-                <a16:creationId xmlns:a16="http://schemas.microsoft.com/office/drawing/2014/main" id="{E4D61A11-F3DB-4342-B936-70E24240EB14}"/>
+                <a16:creationId xmlns:a16="http://schemas.microsoft.com/office/drawing/2014/main" id="{A05B3823-2D0B-4E9D-A5D9-4B090A578DA5}"/>
               </a:ext>
             </a:extLst>
           </p:cNvPr>
@@ -9312,7 +9320,7 @@
           <p:cNvPr id="5" name="">
             <a:extLst xmlns:a="http://schemas.openxmlformats.org/drawingml/2006/main">
               <a:ext uri="{FF2B5EF4-FFF2-40B4-BE49-F238E27FC236}">
-                <a16:creationId xmlns:a16="http://schemas.microsoft.com/office/drawing/2014/main" id="{B80A0D48-2D73-43C0-9FF6-76C34701EC8F}"/>
+                <a16:creationId xmlns:a16="http://schemas.microsoft.com/office/drawing/2014/main" id="{140F7785-FF2E-45F9-B4C6-3DA390CAC6EF}"/>
               </a:ext>
             </a:extLst>
           </p:cNvPr>
@@ -9369,7 +9377,7 @@
           <p:cNvPr id="6" name="">
             <a:extLst xmlns:a="http://schemas.openxmlformats.org/drawingml/2006/main">
               <a:ext uri="{FF2B5EF4-FFF2-40B4-BE49-F238E27FC236}">
-                <a16:creationId xmlns:a16="http://schemas.microsoft.com/office/drawing/2014/main" id="{B295D2C9-4547-43EF-A35E-0C7B834CC22E}"/>
+                <a16:creationId xmlns:a16="http://schemas.microsoft.com/office/drawing/2014/main" id="{004B095B-8CCE-41B5-9805-D1FD57150696}"/>
               </a:ext>
             </a:extLst>
           </p:cNvPr>
@@ -9426,7 +9434,7 @@
           <p:cNvPr id="7" name="">
             <a:extLst xmlns:a="http://schemas.openxmlformats.org/drawingml/2006/main">
               <a:ext uri="{FF2B5EF4-FFF2-40B4-BE49-F238E27FC236}">
-                <a16:creationId xmlns:a16="http://schemas.microsoft.com/office/drawing/2014/main" id="{5A5EE93A-9E25-4CA1-939B-30463D2DEF07}"/>
+                <a16:creationId xmlns:a16="http://schemas.microsoft.com/office/drawing/2014/main" id="{C14B1979-C576-4590-9AB1-BEAD3ECCF540}"/>
               </a:ext>
             </a:extLst>
           </p:cNvPr>
@@ -9458,7 +9466,7 @@
           <p:cNvPr id="8" name="">
             <a:extLst xmlns:a="http://schemas.openxmlformats.org/drawingml/2006/main">
               <a:ext uri="{FF2B5EF4-FFF2-40B4-BE49-F238E27FC236}">
-                <a16:creationId xmlns:a16="http://schemas.microsoft.com/office/drawing/2014/main" id="{0E44510D-D531-4E21-8282-B09D3EA06A3B}"/>
+                <a16:creationId xmlns:a16="http://schemas.microsoft.com/office/drawing/2014/main" id="{4D55FEC9-EA95-429A-96BB-6BF828758320}"/>
               </a:ext>
             </a:extLst>
           </p:cNvPr>
@@ -9515,7 +9523,7 @@
           <p:cNvPr id="9" name="">
             <a:extLst xmlns:a="http://schemas.openxmlformats.org/drawingml/2006/main">
               <a:ext uri="{FF2B5EF4-FFF2-40B4-BE49-F238E27FC236}">
-                <a16:creationId xmlns:a16="http://schemas.microsoft.com/office/drawing/2014/main" id="{993FD9A4-CC1A-449A-B2A9-CD98CF938C87}"/>
+                <a16:creationId xmlns:a16="http://schemas.microsoft.com/office/drawing/2014/main" id="{BBF4C6B7-179D-4771-A91D-BA33AE5EB78E}"/>
               </a:ext>
             </a:extLst>
           </p:cNvPr>
@@ -9572,7 +9580,7 @@
           <p:cNvPr id="10" name="">
             <a:extLst xmlns:a="http://schemas.openxmlformats.org/drawingml/2006/main">
               <a:ext uri="{FF2B5EF4-FFF2-40B4-BE49-F238E27FC236}">
-                <a16:creationId xmlns:a16="http://schemas.microsoft.com/office/drawing/2014/main" id="{867EFAC3-3E55-488B-90AF-6D2ED4E83645}"/>
+                <a16:creationId xmlns:a16="http://schemas.microsoft.com/office/drawing/2014/main" id="{1ECF1FD3-F452-4F00-AEFD-88A026C9AC67}"/>
               </a:ext>
             </a:extLst>
           </p:cNvPr>
@@ -9629,7 +9637,7 @@
           <p:cNvPr id="11" name="">
             <a:extLst xmlns:a="http://schemas.openxmlformats.org/drawingml/2006/main">
               <a:ext uri="{FF2B5EF4-FFF2-40B4-BE49-F238E27FC236}">
-                <a16:creationId xmlns:a16="http://schemas.microsoft.com/office/drawing/2014/main" id="{E42F03CF-7B53-491A-9A7E-12314A95FA71}"/>
+                <a16:creationId xmlns:a16="http://schemas.microsoft.com/office/drawing/2014/main" id="{6C3DB914-1876-4FEC-B060-C6558705F963}"/>
               </a:ext>
             </a:extLst>
           </p:cNvPr>
@@ -9686,7 +9694,7 @@
           <p:cNvPr id="12" name="">
             <a:extLst xmlns:a="http://schemas.openxmlformats.org/drawingml/2006/main">
               <a:ext uri="{FF2B5EF4-FFF2-40B4-BE49-F238E27FC236}">
-                <a16:creationId xmlns:a16="http://schemas.microsoft.com/office/drawing/2014/main" id="{ABD285B8-2036-419C-9043-C8AAACBD5138}"/>
+                <a16:creationId xmlns:a16="http://schemas.microsoft.com/office/drawing/2014/main" id="{2FCECA02-E74D-47AA-B469-49DDBF4AA6EA}"/>
               </a:ext>
             </a:extLst>
           </p:cNvPr>
@@ -9718,7 +9726,7 @@
           <p:cNvPr id="13" name="">
             <a:extLst xmlns:a="http://schemas.openxmlformats.org/drawingml/2006/main">
               <a:ext uri="{FF2B5EF4-FFF2-40B4-BE49-F238E27FC236}">
-                <a16:creationId xmlns:a16="http://schemas.microsoft.com/office/drawing/2014/main" id="{3BD5C765-9523-43DA-87EF-818DADE7FDB2}"/>
+                <a16:creationId xmlns:a16="http://schemas.microsoft.com/office/drawing/2014/main" id="{9CC866EA-15A8-4981-95C7-4027EA19A63F}"/>
               </a:ext>
             </a:extLst>
           </p:cNvPr>
@@ -9775,7 +9783,7 @@
           <p:cNvPr id="14" name="">
             <a:extLst xmlns:a="http://schemas.openxmlformats.org/drawingml/2006/main">
               <a:ext uri="{FF2B5EF4-FFF2-40B4-BE49-F238E27FC236}">
-                <a16:creationId xmlns:a16="http://schemas.microsoft.com/office/drawing/2014/main" id="{BC37C7F4-3030-422B-BB69-9F48371640FD}"/>
+                <a16:creationId xmlns:a16="http://schemas.microsoft.com/office/drawing/2014/main" id="{62DEA5E8-5C68-4A98-8AB5-049A01C7D55D}"/>
               </a:ext>
             </a:extLst>
           </p:cNvPr>
@@ -9830,7 +9838,7 @@
     </p:spTree>
     <p:extLst>
       <p:ext uri="{BB962C8B-B14F-4D97-AF65-F5344CB8AC3E}">
-        <p14:creationId xmlns:p14="http://schemas.microsoft.com/office/powerpoint/2010/main" val="1821968319"/>
+        <p14:creationId xmlns:p14="http://schemas.microsoft.com/office/powerpoint/2010/main" val="1923210743"/>
       </p:ext>
     </p:extLst>
   </p:cSld>
@@ -10031,7 +10039,7 @@
           <p:cNvPr id="16" name="">
             <a:extLst xmlns:a="http://schemas.openxmlformats.org/drawingml/2006/main">
               <a:ext uri="{FF2B5EF4-FFF2-40B4-BE49-F238E27FC236}">
-                <a16:creationId xmlns:a16="http://schemas.microsoft.com/office/drawing/2014/main" id="{F262F829-568D-488A-9352-E3402B53BA41}"/>
+                <a16:creationId xmlns:a16="http://schemas.microsoft.com/office/drawing/2014/main" id="{42CD4E91-C165-4E62-952A-04C927CC347A}"/>
               </a:ext>
             </a:extLst>
           </p:cNvPr>
@@ -10063,7 +10071,7 @@
           <p:cNvPr id="2" name="">
             <a:extLst xmlns:a="http://schemas.openxmlformats.org/drawingml/2006/main">
               <a:ext uri="{FF2B5EF4-FFF2-40B4-BE49-F238E27FC236}">
-                <a16:creationId xmlns:a16="http://schemas.microsoft.com/office/drawing/2014/main" id="{D718C45B-0905-4FAC-8B41-6E1A6B564CBE}"/>
+                <a16:creationId xmlns:a16="http://schemas.microsoft.com/office/drawing/2014/main" id="{FE0536DC-5A39-4C6A-BD5F-14DF39DA4C20}"/>
               </a:ext>
             </a:extLst>
           </p:cNvPr>
@@ -10120,7 +10128,7 @@
           <p:cNvPr id="3" name="">
             <a:extLst xmlns:a="http://schemas.openxmlformats.org/drawingml/2006/main">
               <a:ext uri="{FF2B5EF4-FFF2-40B4-BE49-F238E27FC236}">
-                <a16:creationId xmlns:a16="http://schemas.microsoft.com/office/drawing/2014/main" id="{7C3EE7D7-D57E-4A9E-AAD1-E484DBEE45FA}"/>
+                <a16:creationId xmlns:a16="http://schemas.microsoft.com/office/drawing/2014/main" id="{126F6710-240A-4E47-B73D-3CF7A2C859A9}"/>
               </a:ext>
             </a:extLst>
           </p:cNvPr>
@@ -10152,7 +10160,7 @@
           <p:cNvPr id="4" name="">
             <a:extLst xmlns:a="http://schemas.openxmlformats.org/drawingml/2006/main">
               <a:ext uri="{FF2B5EF4-FFF2-40B4-BE49-F238E27FC236}">
-                <a16:creationId xmlns:a16="http://schemas.microsoft.com/office/drawing/2014/main" id="{B9500D2D-498A-4CFE-BE97-2D53CD6AE724}"/>
+                <a16:creationId xmlns:a16="http://schemas.microsoft.com/office/drawing/2014/main" id="{79E508B2-0516-4D02-B594-72693798A677}"/>
               </a:ext>
             </a:extLst>
           </p:cNvPr>
@@ -10209,7 +10217,7 @@
           <p:cNvPr id="5" name="">
             <a:extLst xmlns:a="http://schemas.openxmlformats.org/drawingml/2006/main">
               <a:ext uri="{FF2B5EF4-FFF2-40B4-BE49-F238E27FC236}">
-                <a16:creationId xmlns:a16="http://schemas.microsoft.com/office/drawing/2014/main" id="{3BBF927E-EBDA-44B7-B73A-04114CC5E70F}"/>
+                <a16:creationId xmlns:a16="http://schemas.microsoft.com/office/drawing/2014/main" id="{B81B6FB4-9DC2-41C6-B0C8-D0576C03CBA1}"/>
               </a:ext>
             </a:extLst>
           </p:cNvPr>
@@ -10266,7 +10274,7 @@
           <p:cNvPr id="6" name="">
             <a:extLst xmlns:a="http://schemas.openxmlformats.org/drawingml/2006/main">
               <a:ext uri="{FF2B5EF4-FFF2-40B4-BE49-F238E27FC236}">
-                <a16:creationId xmlns:a16="http://schemas.microsoft.com/office/drawing/2014/main" id="{D87CB827-4093-4598-B17A-9709A624CA1C}"/>
+                <a16:creationId xmlns:a16="http://schemas.microsoft.com/office/drawing/2014/main" id="{B6B82A89-3C43-40E8-AE5B-B7D4CCE410DF}"/>
               </a:ext>
             </a:extLst>
           </p:cNvPr>
@@ -10323,7 +10331,7 @@
           <p:cNvPr id="7" name="">
             <a:extLst xmlns:a="http://schemas.openxmlformats.org/drawingml/2006/main">
               <a:ext uri="{FF2B5EF4-FFF2-40B4-BE49-F238E27FC236}">
-                <a16:creationId xmlns:a16="http://schemas.microsoft.com/office/drawing/2014/main" id="{E73DBB62-CFEA-4C94-8747-05810DF98317}"/>
+                <a16:creationId xmlns:a16="http://schemas.microsoft.com/office/drawing/2014/main" id="{5B0CFBCB-0BE9-4043-9B16-4BD75DB9037F}"/>
               </a:ext>
             </a:extLst>
           </p:cNvPr>
@@ -10355,7 +10363,7 @@
           <p:cNvPr id="8" name="">
             <a:extLst xmlns:a="http://schemas.openxmlformats.org/drawingml/2006/main">
               <a:ext uri="{FF2B5EF4-FFF2-40B4-BE49-F238E27FC236}">
-                <a16:creationId xmlns:a16="http://schemas.microsoft.com/office/drawing/2014/main" id="{A702D64E-E371-4AE7-87C6-6D0101E36D5E}"/>
+                <a16:creationId xmlns:a16="http://schemas.microsoft.com/office/drawing/2014/main" id="{88F3B647-23E6-495F-AA0A-B49C9186A934}"/>
               </a:ext>
             </a:extLst>
           </p:cNvPr>
@@ -10412,7 +10420,7 @@
           <p:cNvPr id="9" name="">
             <a:extLst xmlns:a="http://schemas.openxmlformats.org/drawingml/2006/main">
               <a:ext uri="{FF2B5EF4-FFF2-40B4-BE49-F238E27FC236}">
-                <a16:creationId xmlns:a16="http://schemas.microsoft.com/office/drawing/2014/main" id="{A09EFA32-A258-48A7-8FF0-009EF65A442D}"/>
+                <a16:creationId xmlns:a16="http://schemas.microsoft.com/office/drawing/2014/main" id="{ACC1905F-AD9D-4DDD-9BBA-FC2CD976619B}"/>
               </a:ext>
             </a:extLst>
           </p:cNvPr>
@@ -10469,7 +10477,7 @@
           <p:cNvPr id="10" name="">
             <a:extLst xmlns:a="http://schemas.openxmlformats.org/drawingml/2006/main">
               <a:ext uri="{FF2B5EF4-FFF2-40B4-BE49-F238E27FC236}">
-                <a16:creationId xmlns:a16="http://schemas.microsoft.com/office/drawing/2014/main" id="{B20DFB04-717E-47E1-B355-01C44BBA8D8D}"/>
+                <a16:creationId xmlns:a16="http://schemas.microsoft.com/office/drawing/2014/main" id="{1452A6EB-690E-4514-B485-0B35650CDD4B}"/>
               </a:ext>
             </a:extLst>
           </p:cNvPr>
@@ -10526,7 +10534,7 @@
           <p:cNvPr id="11" name="">
             <a:extLst xmlns:a="http://schemas.openxmlformats.org/drawingml/2006/main">
               <a:ext uri="{FF2B5EF4-FFF2-40B4-BE49-F238E27FC236}">
-                <a16:creationId xmlns:a16="http://schemas.microsoft.com/office/drawing/2014/main" id="{74488A55-2B8E-436D-895C-D5BB5D569501}"/>
+                <a16:creationId xmlns:a16="http://schemas.microsoft.com/office/drawing/2014/main" id="{8D56D4A1-E5DB-404E-9954-51CA063882DB}"/>
               </a:ext>
             </a:extLst>
           </p:cNvPr>
@@ -10583,7 +10591,7 @@
           <p:cNvPr id="12" name="">
             <a:extLst xmlns:a="http://schemas.openxmlformats.org/drawingml/2006/main">
               <a:ext uri="{FF2B5EF4-FFF2-40B4-BE49-F238E27FC236}">
-                <a16:creationId xmlns:a16="http://schemas.microsoft.com/office/drawing/2014/main" id="{E6302FD5-0DEC-4FB1-91D2-2B060006CE9E}"/>
+                <a16:creationId xmlns:a16="http://schemas.microsoft.com/office/drawing/2014/main" id="{8C2D0D36-5DA7-4DA1-A68D-C9D877B99E54}"/>
               </a:ext>
             </a:extLst>
           </p:cNvPr>
@@ -10640,7 +10648,7 @@
           <p:cNvPr id="13" name="">
             <a:extLst xmlns:a="http://schemas.openxmlformats.org/drawingml/2006/main">
               <a:ext uri="{FF2B5EF4-FFF2-40B4-BE49-F238E27FC236}">
-                <a16:creationId xmlns:a16="http://schemas.microsoft.com/office/drawing/2014/main" id="{72DDAC60-6FDE-4EA3-A4D1-A664F69669A9}"/>
+                <a16:creationId xmlns:a16="http://schemas.microsoft.com/office/drawing/2014/main" id="{F7C4623D-B6A7-4921-8DD6-9617B31BC574}"/>
               </a:ext>
             </a:extLst>
           </p:cNvPr>
@@ -10697,7 +10705,7 @@
           <p:cNvPr id="14" name="">
             <a:extLst xmlns:a="http://schemas.openxmlformats.org/drawingml/2006/main">
               <a:ext uri="{FF2B5EF4-FFF2-40B4-BE49-F238E27FC236}">
-                <a16:creationId xmlns:a16="http://schemas.microsoft.com/office/drawing/2014/main" id="{40895702-E592-4E26-BEBD-913C537D935C}"/>
+                <a16:creationId xmlns:a16="http://schemas.microsoft.com/office/drawing/2014/main" id="{86950240-E484-4BA6-8C16-FCEC6E8D41A7}"/>
               </a:ext>
             </a:extLst>
           </p:cNvPr>
@@ -10754,7 +10762,7 @@
           <p:cNvPr id="15" name="">
             <a:extLst xmlns:a="http://schemas.openxmlformats.org/drawingml/2006/main">
               <a:ext uri="{FF2B5EF4-FFF2-40B4-BE49-F238E27FC236}">
-                <a16:creationId xmlns:a16="http://schemas.microsoft.com/office/drawing/2014/main" id="{D7C2BFA7-B231-42A4-BC2E-5E5495710B54}"/>
+                <a16:creationId xmlns:a16="http://schemas.microsoft.com/office/drawing/2014/main" id="{F101E36C-8701-4C97-BEE7-CE637C6021BD}"/>
               </a:ext>
             </a:extLst>
           </p:cNvPr>
@@ -10809,7 +10817,7 @@
     </p:spTree>
     <p:extLst>
       <p:ext uri="{BB962C8B-B14F-4D97-AF65-F5344CB8AC3E}">
-        <p14:creationId xmlns:p14="http://schemas.microsoft.com/office/powerpoint/2010/main" val="1178907270"/>
+        <p14:creationId xmlns:p14="http://schemas.microsoft.com/office/powerpoint/2010/main" val="1821410083"/>
       </p:ext>
     </p:extLst>
   </p:cSld>
@@ -10964,7 +10972,7 @@
           <p:cNvPr id="16" name="">
             <a:extLst xmlns:a="http://schemas.openxmlformats.org/drawingml/2006/main">
               <a:ext uri="{FF2B5EF4-FFF2-40B4-BE49-F238E27FC236}">
-                <a16:creationId xmlns:a16="http://schemas.microsoft.com/office/drawing/2014/main" id="{639C9786-651C-4D08-B863-E79976D5A97C}"/>
+                <a16:creationId xmlns:a16="http://schemas.microsoft.com/office/drawing/2014/main" id="{C8065942-5EE3-4DC2-877B-600425DD7384}"/>
               </a:ext>
             </a:extLst>
           </p:cNvPr>
@@ -10996,7 +11004,7 @@
           <p:cNvPr id="2" name="">
             <a:extLst xmlns:a="http://schemas.openxmlformats.org/drawingml/2006/main">
               <a:ext uri="{FF2B5EF4-FFF2-40B4-BE49-F238E27FC236}">
-                <a16:creationId xmlns:a16="http://schemas.microsoft.com/office/drawing/2014/main" id="{A9E4CF46-262F-4EB0-9DFF-AAEF926BBFF5}"/>
+                <a16:creationId xmlns:a16="http://schemas.microsoft.com/office/drawing/2014/main" id="{49621E1A-A109-47C5-A255-2AC972BB2BFE}"/>
               </a:ext>
             </a:extLst>
           </p:cNvPr>
@@ -11053,7 +11061,7 @@
           <p:cNvPr id="3" name="">
             <a:extLst xmlns:a="http://schemas.openxmlformats.org/drawingml/2006/main">
               <a:ext uri="{FF2B5EF4-FFF2-40B4-BE49-F238E27FC236}">
-                <a16:creationId xmlns:a16="http://schemas.microsoft.com/office/drawing/2014/main" id="{F314660D-88FC-4015-A3E4-65AC31BD2A6B}"/>
+                <a16:creationId xmlns:a16="http://schemas.microsoft.com/office/drawing/2014/main" id="{FCD80848-0D3F-4FA4-A448-CC7193C4F415}"/>
               </a:ext>
             </a:extLst>
           </p:cNvPr>
@@ -11085,7 +11093,7 @@
           <p:cNvPr id="4" name="">
             <a:extLst xmlns:a="http://schemas.openxmlformats.org/drawingml/2006/main">
               <a:ext uri="{FF2B5EF4-FFF2-40B4-BE49-F238E27FC236}">
-                <a16:creationId xmlns:a16="http://schemas.microsoft.com/office/drawing/2014/main" id="{6907EFF3-785F-431B-8496-FB83DD8A3B17}"/>
+                <a16:creationId xmlns:a16="http://schemas.microsoft.com/office/drawing/2014/main" id="{10A610D3-FFE2-4630-9D8E-738B02F368F5}"/>
               </a:ext>
             </a:extLst>
           </p:cNvPr>
@@ -11142,7 +11150,7 @@
           <p:cNvPr id="5" name="">
             <a:extLst xmlns:a="http://schemas.openxmlformats.org/drawingml/2006/main">
               <a:ext uri="{FF2B5EF4-FFF2-40B4-BE49-F238E27FC236}">
-                <a16:creationId xmlns:a16="http://schemas.microsoft.com/office/drawing/2014/main" id="{114FA119-CFF0-444B-A723-42289F3A2873}"/>
+                <a16:creationId xmlns:a16="http://schemas.microsoft.com/office/drawing/2014/main" id="{D45911BD-4C14-4E5A-899A-9276D9656D89}"/>
               </a:ext>
             </a:extLst>
           </p:cNvPr>
@@ -11199,7 +11207,7 @@
           <p:cNvPr id="6" name="">
             <a:extLst xmlns:a="http://schemas.openxmlformats.org/drawingml/2006/main">
               <a:ext uri="{FF2B5EF4-FFF2-40B4-BE49-F238E27FC236}">
-                <a16:creationId xmlns:a16="http://schemas.microsoft.com/office/drawing/2014/main" id="{68D92863-8AFC-4BA0-BD2B-CE578F66AA23}"/>
+                <a16:creationId xmlns:a16="http://schemas.microsoft.com/office/drawing/2014/main" id="{5DF43C3D-FECC-4C69-A0A8-E592DFC7DD55}"/>
               </a:ext>
             </a:extLst>
           </p:cNvPr>
@@ -11256,7 +11264,7 @@
           <p:cNvPr id="7" name="">
             <a:extLst xmlns:a="http://schemas.openxmlformats.org/drawingml/2006/main">
               <a:ext uri="{FF2B5EF4-FFF2-40B4-BE49-F238E27FC236}">
-                <a16:creationId xmlns:a16="http://schemas.microsoft.com/office/drawing/2014/main" id="{6DC361B8-0269-4154-8A6B-F5C173657000}"/>
+                <a16:creationId xmlns:a16="http://schemas.microsoft.com/office/drawing/2014/main" id="{E8D1BFC2-8072-4EDB-BCBF-69E4AB333B25}"/>
               </a:ext>
             </a:extLst>
           </p:cNvPr>
@@ -11288,7 +11296,7 @@
           <p:cNvPr id="8" name="">
             <a:extLst xmlns:a="http://schemas.openxmlformats.org/drawingml/2006/main">
               <a:ext uri="{FF2B5EF4-FFF2-40B4-BE49-F238E27FC236}">
-                <a16:creationId xmlns:a16="http://schemas.microsoft.com/office/drawing/2014/main" id="{8C05ACAC-76FB-49A6-9004-273432C781EC}"/>
+                <a16:creationId xmlns:a16="http://schemas.microsoft.com/office/drawing/2014/main" id="{6720AACA-6790-443F-9C84-20CA5D5BBCA8}"/>
               </a:ext>
             </a:extLst>
           </p:cNvPr>
@@ -11345,7 +11353,7 @@
           <p:cNvPr id="9" name="">
             <a:extLst xmlns:a="http://schemas.openxmlformats.org/drawingml/2006/main">
               <a:ext uri="{FF2B5EF4-FFF2-40B4-BE49-F238E27FC236}">
-                <a16:creationId xmlns:a16="http://schemas.microsoft.com/office/drawing/2014/main" id="{CD1636AE-139B-418F-8B10-3BADD73549F5}"/>
+                <a16:creationId xmlns:a16="http://schemas.microsoft.com/office/drawing/2014/main" id="{81BA9C96-9017-4562-BFD8-35457976FED8}"/>
               </a:ext>
             </a:extLst>
           </p:cNvPr>
@@ -11406,7 +11414,7 @@
           <p:nvPr/>
         </p:nvPicPr>
         <p:blipFill>
-          <a:blip xmlns:r="http://schemas.openxmlformats.org/officeDocument/2006/relationships" xmlns:a="http://schemas.openxmlformats.org/drawingml/2006/main" r:embed="R0afd8c6aaa4a41ee"/>
+          <a:blip xmlns:r="http://schemas.openxmlformats.org/officeDocument/2006/relationships" xmlns:a="http://schemas.openxmlformats.org/drawingml/2006/main" r:embed="Ra09b2a585621476f"/>
           <a:stretch xmlns:a="http://schemas.openxmlformats.org/drawingml/2006/main"/>
         </p:blipFill>
         <p:spPr>
@@ -11424,7 +11432,7 @@
           <p:cNvPr id="11" name="">
             <a:extLst xmlns:a="http://schemas.openxmlformats.org/drawingml/2006/main">
               <a:ext uri="{FF2B5EF4-FFF2-40B4-BE49-F238E27FC236}">
-                <a16:creationId xmlns:a16="http://schemas.microsoft.com/office/drawing/2014/main" id="{96D7AA11-73AD-4144-ADA8-0B2D98A52797}"/>
+                <a16:creationId xmlns:a16="http://schemas.microsoft.com/office/drawing/2014/main" id="{DA453A57-E1DD-4C16-B53E-E7397C7A2DB1}"/>
               </a:ext>
             </a:extLst>
           </p:cNvPr>
@@ -11481,7 +11489,7 @@
           <p:cNvPr id="12" name="">
             <a:extLst xmlns:a="http://schemas.openxmlformats.org/drawingml/2006/main">
               <a:ext uri="{FF2B5EF4-FFF2-40B4-BE49-F238E27FC236}">
-                <a16:creationId xmlns:a16="http://schemas.microsoft.com/office/drawing/2014/main" id="{7F21E9AD-A2EE-4C2D-B2BF-39423FE554A3}"/>
+                <a16:creationId xmlns:a16="http://schemas.microsoft.com/office/drawing/2014/main" id="{E2F71003-AFDC-4EB1-9B32-4F60F316D9AF}"/>
               </a:ext>
             </a:extLst>
           </p:cNvPr>
@@ -11538,7 +11546,7 @@
           <p:cNvPr id="13" name="">
             <a:extLst xmlns:a="http://schemas.openxmlformats.org/drawingml/2006/main">
               <a:ext uri="{FF2B5EF4-FFF2-40B4-BE49-F238E27FC236}">
-                <a16:creationId xmlns:a16="http://schemas.microsoft.com/office/drawing/2014/main" id="{A0B0DA83-FB28-4B69-948E-7850E114F410}"/>
+                <a16:creationId xmlns:a16="http://schemas.microsoft.com/office/drawing/2014/main" id="{67751B2E-1D6B-4538-9C44-E48BEB073BE7}"/>
               </a:ext>
             </a:extLst>
           </p:cNvPr>
@@ -11570,7 +11578,7 @@
           <p:cNvPr id="14" name="">
             <a:extLst xmlns:a="http://schemas.openxmlformats.org/drawingml/2006/main">
               <a:ext uri="{FF2B5EF4-FFF2-40B4-BE49-F238E27FC236}">
-                <a16:creationId xmlns:a16="http://schemas.microsoft.com/office/drawing/2014/main" id="{02D9D0A6-B92E-4F8E-AA12-09741C4846CC}"/>
+                <a16:creationId xmlns:a16="http://schemas.microsoft.com/office/drawing/2014/main" id="{6A1B6E0D-2222-49D0-8E47-3A6C3E2110F8}"/>
               </a:ext>
             </a:extLst>
           </p:cNvPr>
@@ -11627,7 +11635,7 @@
           <p:cNvPr id="15" name="">
             <a:extLst xmlns:a="http://schemas.openxmlformats.org/drawingml/2006/main">
               <a:ext uri="{FF2B5EF4-FFF2-40B4-BE49-F238E27FC236}">
-                <a16:creationId xmlns:a16="http://schemas.microsoft.com/office/drawing/2014/main" id="{C8BB9149-C242-4401-A6EC-1D8C3834874D}"/>
+                <a16:creationId xmlns:a16="http://schemas.microsoft.com/office/drawing/2014/main" id="{7B7854B0-89F7-4703-93E4-5D598226DB4D}"/>
               </a:ext>
             </a:extLst>
           </p:cNvPr>
@@ -11682,7 +11690,7 @@
     </p:spTree>
     <p:extLst>
       <p:ext uri="{BB962C8B-B14F-4D97-AF65-F5344CB8AC3E}">
-        <p14:creationId xmlns:p14="http://schemas.microsoft.com/office/powerpoint/2010/main" val="2085641900"/>
+        <p14:creationId xmlns:p14="http://schemas.microsoft.com/office/powerpoint/2010/main" val="319210522"/>
       </p:ext>
     </p:extLst>
   </p:cSld>
@@ -11837,7 +11845,7 @@
           <p:cNvPr id="23" name="">
             <a:extLst xmlns:a="http://schemas.openxmlformats.org/drawingml/2006/main">
               <a:ext uri="{FF2B5EF4-FFF2-40B4-BE49-F238E27FC236}">
-                <a16:creationId xmlns:a16="http://schemas.microsoft.com/office/drawing/2014/main" id="{AF908508-7D3A-4955-9AD9-C5C45D958C4F}"/>
+                <a16:creationId xmlns:a16="http://schemas.microsoft.com/office/drawing/2014/main" id="{4B584961-E1E5-4CA6-811E-70B17CD6623F}"/>
               </a:ext>
             </a:extLst>
           </p:cNvPr>
@@ -11869,7 +11877,7 @@
           <p:cNvPr id="2" name="">
             <a:extLst xmlns:a="http://schemas.openxmlformats.org/drawingml/2006/main">
               <a:ext uri="{FF2B5EF4-FFF2-40B4-BE49-F238E27FC236}">
-                <a16:creationId xmlns:a16="http://schemas.microsoft.com/office/drawing/2014/main" id="{A1756999-ECB4-46ED-B406-FFDD13EF9B03}"/>
+                <a16:creationId xmlns:a16="http://schemas.microsoft.com/office/drawing/2014/main" id="{F1FE0FD4-9650-441B-8061-17A7E811B84A}"/>
               </a:ext>
             </a:extLst>
           </p:cNvPr>
@@ -11926,7 +11934,7 @@
           <p:cNvPr id="3" name="">
             <a:extLst xmlns:a="http://schemas.openxmlformats.org/drawingml/2006/main">
               <a:ext uri="{FF2B5EF4-FFF2-40B4-BE49-F238E27FC236}">
-                <a16:creationId xmlns:a16="http://schemas.microsoft.com/office/drawing/2014/main" id="{BC66F6D7-4F22-4604-80AA-4172B2E0FBD3}"/>
+                <a16:creationId xmlns:a16="http://schemas.microsoft.com/office/drawing/2014/main" id="{E2AC77AC-2E41-470F-85F6-8559D23D150D}"/>
               </a:ext>
             </a:extLst>
           </p:cNvPr>
@@ -11958,7 +11966,7 @@
           <p:cNvPr id="4" name="">
             <a:extLst xmlns:a="http://schemas.openxmlformats.org/drawingml/2006/main">
               <a:ext uri="{FF2B5EF4-FFF2-40B4-BE49-F238E27FC236}">
-                <a16:creationId xmlns:a16="http://schemas.microsoft.com/office/drawing/2014/main" id="{95DC33F8-3D23-448C-9BF1-F32AE7BFCCF4}"/>
+                <a16:creationId xmlns:a16="http://schemas.microsoft.com/office/drawing/2014/main" id="{AE17460F-E948-4B70-A24F-0398E3464FF3}"/>
               </a:ext>
             </a:extLst>
           </p:cNvPr>
@@ -12015,7 +12023,7 @@
           <p:cNvPr id="5" name="">
             <a:extLst xmlns:a="http://schemas.openxmlformats.org/drawingml/2006/main">
               <a:ext uri="{FF2B5EF4-FFF2-40B4-BE49-F238E27FC236}">
-                <a16:creationId xmlns:a16="http://schemas.microsoft.com/office/drawing/2014/main" id="{26C84532-1A9C-4470-AA57-C50119274855}"/>
+                <a16:creationId xmlns:a16="http://schemas.microsoft.com/office/drawing/2014/main" id="{E4566997-EAEE-4601-BE15-5FEF46C2C50E}"/>
               </a:ext>
             </a:extLst>
           </p:cNvPr>
@@ -12072,7 +12080,7 @@
           <p:cNvPr id="6" name="">
             <a:extLst xmlns:a="http://schemas.openxmlformats.org/drawingml/2006/main">
               <a:ext uri="{FF2B5EF4-FFF2-40B4-BE49-F238E27FC236}">
-                <a16:creationId xmlns:a16="http://schemas.microsoft.com/office/drawing/2014/main" id="{17B967BA-F21F-4BAC-9432-055750F7DD67}"/>
+                <a16:creationId xmlns:a16="http://schemas.microsoft.com/office/drawing/2014/main" id="{D6546A52-1400-48D4-9ECA-31674F75AB2B}"/>
               </a:ext>
             </a:extLst>
           </p:cNvPr>
@@ -12129,7 +12137,7 @@
           <p:cNvPr id="7" name="">
             <a:extLst xmlns:a="http://schemas.openxmlformats.org/drawingml/2006/main">
               <a:ext uri="{FF2B5EF4-FFF2-40B4-BE49-F238E27FC236}">
-                <a16:creationId xmlns:a16="http://schemas.microsoft.com/office/drawing/2014/main" id="{689A8AA4-A8DD-4EF4-9A68-B4A14CAD1FBA}"/>
+                <a16:creationId xmlns:a16="http://schemas.microsoft.com/office/drawing/2014/main" id="{6787F2AE-DF8F-4802-BE10-D634C8782D30}"/>
               </a:ext>
             </a:extLst>
           </p:cNvPr>
@@ -12161,7 +12169,7 @@
           <p:cNvPr id="8" name="">
             <a:extLst xmlns:a="http://schemas.openxmlformats.org/drawingml/2006/main">
               <a:ext uri="{FF2B5EF4-FFF2-40B4-BE49-F238E27FC236}">
-                <a16:creationId xmlns:a16="http://schemas.microsoft.com/office/drawing/2014/main" id="{76B95355-33E4-4208-8AB6-817B657B0CF0}"/>
+                <a16:creationId xmlns:a16="http://schemas.microsoft.com/office/drawing/2014/main" id="{9A689A6C-5851-4D52-AAC7-FC1790FC6F68}"/>
               </a:ext>
             </a:extLst>
           </p:cNvPr>
@@ -12218,7 +12226,7 @@
           <p:cNvPr id="9" name="">
             <a:extLst xmlns:a="http://schemas.openxmlformats.org/drawingml/2006/main">
               <a:ext uri="{FF2B5EF4-FFF2-40B4-BE49-F238E27FC236}">
-                <a16:creationId xmlns:a16="http://schemas.microsoft.com/office/drawing/2014/main" id="{2FB0B736-3335-4027-B8FC-61CBC95FAA49}"/>
+                <a16:creationId xmlns:a16="http://schemas.microsoft.com/office/drawing/2014/main" id="{9727653E-7358-49A0-8431-8F161D39C3F2}"/>
               </a:ext>
             </a:extLst>
           </p:cNvPr>
@@ -12275,7 +12283,7 @@
           <p:cNvPr id="10" name="">
             <a:extLst xmlns:a="http://schemas.openxmlformats.org/drawingml/2006/main">
               <a:ext uri="{FF2B5EF4-FFF2-40B4-BE49-F238E27FC236}">
-                <a16:creationId xmlns:a16="http://schemas.microsoft.com/office/drawing/2014/main" id="{68041474-9407-42A8-897C-2D0C23F210E0}"/>
+                <a16:creationId xmlns:a16="http://schemas.microsoft.com/office/drawing/2014/main" id="{6811DD12-D039-4387-A7F4-3A06201BAE3C}"/>
               </a:ext>
             </a:extLst>
           </p:cNvPr>
@@ -12309,7 +12317,7 @@
           <p:cNvPr id="11" name="">
             <a:extLst xmlns:a="http://schemas.openxmlformats.org/drawingml/2006/main">
               <a:ext uri="{FF2B5EF4-FFF2-40B4-BE49-F238E27FC236}">
-                <a16:creationId xmlns:a16="http://schemas.microsoft.com/office/drawing/2014/main" id="{3277DF89-106B-40F6-B2A1-B0C5CBD84166}"/>
+                <a16:creationId xmlns:a16="http://schemas.microsoft.com/office/drawing/2014/main" id="{3C792280-E6D0-4404-8868-E12D6F28363B}"/>
               </a:ext>
             </a:extLst>
           </p:cNvPr>
@@ -12341,7 +12349,7 @@
           <p:cNvPr id="12" name="">
             <a:extLst xmlns:a="http://schemas.openxmlformats.org/drawingml/2006/main">
               <a:ext uri="{FF2B5EF4-FFF2-40B4-BE49-F238E27FC236}">
-                <a16:creationId xmlns:a16="http://schemas.microsoft.com/office/drawing/2014/main" id="{B9A20E62-9AA0-45BA-BB76-FD7CC136F6AE}"/>
+                <a16:creationId xmlns:a16="http://schemas.microsoft.com/office/drawing/2014/main" id="{ED994EA7-360E-46BA-9406-395CA9DF8C58}"/>
               </a:ext>
             </a:extLst>
           </p:cNvPr>
@@ -12398,7 +12406,7 @@
           <p:cNvPr id="13" name="">
             <a:extLst xmlns:a="http://schemas.openxmlformats.org/drawingml/2006/main">
               <a:ext uri="{FF2B5EF4-FFF2-40B4-BE49-F238E27FC236}">
-                <a16:creationId xmlns:a16="http://schemas.microsoft.com/office/drawing/2014/main" id="{0EF41CA5-5D0A-417B-AE17-0F4E0144343E}"/>
+                <a16:creationId xmlns:a16="http://schemas.microsoft.com/office/drawing/2014/main" id="{194286D7-FF25-444F-AC99-32B6E509A0CB}"/>
               </a:ext>
             </a:extLst>
           </p:cNvPr>
@@ -12455,7 +12463,7 @@
           <p:cNvPr id="14" name="">
             <a:extLst xmlns:a="http://schemas.openxmlformats.org/drawingml/2006/main">
               <a:ext uri="{FF2B5EF4-FFF2-40B4-BE49-F238E27FC236}">
-                <a16:creationId xmlns:a16="http://schemas.microsoft.com/office/drawing/2014/main" id="{C23DA737-CE2E-47B0-8904-480A279A2737}"/>
+                <a16:creationId xmlns:a16="http://schemas.microsoft.com/office/drawing/2014/main" id="{9E3AEB6E-1F15-471C-B6BE-422F12E9D2EA}"/>
               </a:ext>
             </a:extLst>
           </p:cNvPr>
@@ -12489,7 +12497,7 @@
           <p:cNvPr id="15" name="">
             <a:extLst xmlns:a="http://schemas.openxmlformats.org/drawingml/2006/main">
               <a:ext uri="{FF2B5EF4-FFF2-40B4-BE49-F238E27FC236}">
-                <a16:creationId xmlns:a16="http://schemas.microsoft.com/office/drawing/2014/main" id="{421950F0-77A5-433F-B6DE-F2B9FF8B36D2}"/>
+                <a16:creationId xmlns:a16="http://schemas.microsoft.com/office/drawing/2014/main" id="{FA4E792C-A912-400B-BF37-E30925A1EFE1}"/>
               </a:ext>
             </a:extLst>
           </p:cNvPr>
@@ -12521,7 +12529,7 @@
           <p:cNvPr id="16" name="">
             <a:extLst xmlns:a="http://schemas.openxmlformats.org/drawingml/2006/main">
               <a:ext uri="{FF2B5EF4-FFF2-40B4-BE49-F238E27FC236}">
-                <a16:creationId xmlns:a16="http://schemas.microsoft.com/office/drawing/2014/main" id="{8EDAE66C-7DA9-4AF5-9B35-00C5DF03B45D}"/>
+                <a16:creationId xmlns:a16="http://schemas.microsoft.com/office/drawing/2014/main" id="{15A8B66F-D0E5-4CD2-A869-FF74C19B37D6}"/>
               </a:ext>
             </a:extLst>
           </p:cNvPr>
@@ -12578,7 +12586,7 @@
           <p:cNvPr id="17" name="">
             <a:extLst xmlns:a="http://schemas.openxmlformats.org/drawingml/2006/main">
               <a:ext uri="{FF2B5EF4-FFF2-40B4-BE49-F238E27FC236}">
-                <a16:creationId xmlns:a16="http://schemas.microsoft.com/office/drawing/2014/main" id="{B6B194FB-7211-4BAF-B543-CFE515063F1B}"/>
+                <a16:creationId xmlns:a16="http://schemas.microsoft.com/office/drawing/2014/main" id="{9DFA085E-598C-45D0-BC67-0FA8FDD43835}"/>
               </a:ext>
             </a:extLst>
           </p:cNvPr>
@@ -12635,7 +12643,7 @@
           <p:cNvPr id="18" name="">
             <a:extLst xmlns:a="http://schemas.openxmlformats.org/drawingml/2006/main">
               <a:ext uri="{FF2B5EF4-FFF2-40B4-BE49-F238E27FC236}">
-                <a16:creationId xmlns:a16="http://schemas.microsoft.com/office/drawing/2014/main" id="{0AB1ABF3-AEE5-4182-98C2-427E43109F79}"/>
+                <a16:creationId xmlns:a16="http://schemas.microsoft.com/office/drawing/2014/main" id="{77A58E50-6569-40BC-A751-60B02D734389}"/>
               </a:ext>
             </a:extLst>
           </p:cNvPr>
@@ -12669,7 +12677,7 @@
           <p:cNvPr id="19" name="">
             <a:extLst xmlns:a="http://schemas.openxmlformats.org/drawingml/2006/main">
               <a:ext uri="{FF2B5EF4-FFF2-40B4-BE49-F238E27FC236}">
-                <a16:creationId xmlns:a16="http://schemas.microsoft.com/office/drawing/2014/main" id="{2A3406D1-363B-46F2-9B09-C19D9919632B}"/>
+                <a16:creationId xmlns:a16="http://schemas.microsoft.com/office/drawing/2014/main" id="{564ED2A2-7465-46A5-A16F-0FC95A475510}"/>
               </a:ext>
             </a:extLst>
           </p:cNvPr>
@@ -12701,7 +12709,7 @@
           <p:cNvPr id="20" name="">
             <a:extLst xmlns:a="http://schemas.openxmlformats.org/drawingml/2006/main">
               <a:ext uri="{FF2B5EF4-FFF2-40B4-BE49-F238E27FC236}">
-                <a16:creationId xmlns:a16="http://schemas.microsoft.com/office/drawing/2014/main" id="{974BBC04-093B-4348-99C3-CAA961FDB883}"/>
+                <a16:creationId xmlns:a16="http://schemas.microsoft.com/office/drawing/2014/main" id="{7322C54B-987C-4166-97F4-04D1C6F9AF98}"/>
               </a:ext>
             </a:extLst>
           </p:cNvPr>
@@ -12758,7 +12766,7 @@
           <p:cNvPr id="21" name="">
             <a:extLst xmlns:a="http://schemas.openxmlformats.org/drawingml/2006/main">
               <a:ext uri="{FF2B5EF4-FFF2-40B4-BE49-F238E27FC236}">
-                <a16:creationId xmlns:a16="http://schemas.microsoft.com/office/drawing/2014/main" id="{BD4B4E78-23EA-4D77-9933-FCFE29E7E6D4}"/>
+                <a16:creationId xmlns:a16="http://schemas.microsoft.com/office/drawing/2014/main" id="{0ED999CA-AC1B-48B5-BE1D-B17178FAA231}"/>
               </a:ext>
             </a:extLst>
           </p:cNvPr>
@@ -12815,7 +12823,7 @@
           <p:cNvPr id="22" name="">
             <a:extLst xmlns:a="http://schemas.openxmlformats.org/drawingml/2006/main">
               <a:ext uri="{FF2B5EF4-FFF2-40B4-BE49-F238E27FC236}">
-                <a16:creationId xmlns:a16="http://schemas.microsoft.com/office/drawing/2014/main" id="{931D137A-4602-4CAD-A1DE-31E15C273E25}"/>
+                <a16:creationId xmlns:a16="http://schemas.microsoft.com/office/drawing/2014/main" id="{7FA68DA0-79BA-4B53-8313-0E73D3C36500}"/>
               </a:ext>
             </a:extLst>
           </p:cNvPr>
@@ -12870,7 +12878,7 @@
     </p:spTree>
     <p:extLst>
       <p:ext uri="{BB962C8B-B14F-4D97-AF65-F5344CB8AC3E}">
-        <p14:creationId xmlns:p14="http://schemas.microsoft.com/office/powerpoint/2010/main" val="1906704278"/>
+        <p14:creationId xmlns:p14="http://schemas.microsoft.com/office/powerpoint/2010/main" val="1229956973"/>
       </p:ext>
     </p:extLst>
   </p:cSld>
@@ -13071,7 +13079,7 @@
           <p:cNvPr id="22" name="">
             <a:extLst xmlns:a="http://schemas.openxmlformats.org/drawingml/2006/main">
               <a:ext uri="{FF2B5EF4-FFF2-40B4-BE49-F238E27FC236}">
-                <a16:creationId xmlns:a16="http://schemas.microsoft.com/office/drawing/2014/main" id="{F7736E1A-AD5F-4101-A413-AD670CBF7853}"/>
+                <a16:creationId xmlns:a16="http://schemas.microsoft.com/office/drawing/2014/main" id="{C1BD673B-E040-4FE7-B1D0-37F9C4192573}"/>
               </a:ext>
             </a:extLst>
           </p:cNvPr>
@@ -13103,7 +13111,7 @@
           <p:cNvPr id="2" name="">
             <a:extLst xmlns:a="http://schemas.openxmlformats.org/drawingml/2006/main">
               <a:ext uri="{FF2B5EF4-FFF2-40B4-BE49-F238E27FC236}">
-                <a16:creationId xmlns:a16="http://schemas.microsoft.com/office/drawing/2014/main" id="{4834F0C8-DD75-4F86-A156-9DE1F65A2885}"/>
+                <a16:creationId xmlns:a16="http://schemas.microsoft.com/office/drawing/2014/main" id="{332938EF-25B3-4BBC-83E7-7ED0BBA77C16}"/>
               </a:ext>
             </a:extLst>
           </p:cNvPr>
@@ -13160,7 +13168,7 @@
           <p:cNvPr id="3" name="">
             <a:extLst xmlns:a="http://schemas.openxmlformats.org/drawingml/2006/main">
               <a:ext uri="{FF2B5EF4-FFF2-40B4-BE49-F238E27FC236}">
-                <a16:creationId xmlns:a16="http://schemas.microsoft.com/office/drawing/2014/main" id="{99066067-32E3-4A6F-A7EC-565CA8939216}"/>
+                <a16:creationId xmlns:a16="http://schemas.microsoft.com/office/drawing/2014/main" id="{BB98FF5D-5B58-4AF0-81DE-8AA11B3D74C6}"/>
               </a:ext>
             </a:extLst>
           </p:cNvPr>
@@ -13192,7 +13200,7 @@
           <p:cNvPr id="4" name="">
             <a:extLst xmlns:a="http://schemas.openxmlformats.org/drawingml/2006/main">
               <a:ext uri="{FF2B5EF4-FFF2-40B4-BE49-F238E27FC236}">
-                <a16:creationId xmlns:a16="http://schemas.microsoft.com/office/drawing/2014/main" id="{FBB431C3-0218-453B-BD32-E4CB91FFB022}"/>
+                <a16:creationId xmlns:a16="http://schemas.microsoft.com/office/drawing/2014/main" id="{46515843-E88D-427E-85DF-45D0F417118F}"/>
               </a:ext>
             </a:extLst>
           </p:cNvPr>
@@ -13249,7 +13257,7 @@
           <p:cNvPr id="5" name="">
             <a:extLst xmlns:a="http://schemas.openxmlformats.org/drawingml/2006/main">
               <a:ext uri="{FF2B5EF4-FFF2-40B4-BE49-F238E27FC236}">
-                <a16:creationId xmlns:a16="http://schemas.microsoft.com/office/drawing/2014/main" id="{638FDC35-7616-4F3A-A27F-1E703A4F52C2}"/>
+                <a16:creationId xmlns:a16="http://schemas.microsoft.com/office/drawing/2014/main" id="{338973EC-7948-49BC-AAB3-24454B099B6B}"/>
               </a:ext>
             </a:extLst>
           </p:cNvPr>
@@ -13306,7 +13314,7 @@
           <p:cNvPr id="6" name="">
             <a:extLst xmlns:a="http://schemas.openxmlformats.org/drawingml/2006/main">
               <a:ext uri="{FF2B5EF4-FFF2-40B4-BE49-F238E27FC236}">
-                <a16:creationId xmlns:a16="http://schemas.microsoft.com/office/drawing/2014/main" id="{D2F2405D-5177-423A-9273-ABF80324BDED}"/>
+                <a16:creationId xmlns:a16="http://schemas.microsoft.com/office/drawing/2014/main" id="{37D35ACE-88D8-4005-99F2-B2EFF96B83C7}"/>
               </a:ext>
             </a:extLst>
           </p:cNvPr>
@@ -13363,7 +13371,7 @@
           <p:cNvPr id="7" name="">
             <a:extLst xmlns:a="http://schemas.openxmlformats.org/drawingml/2006/main">
               <a:ext uri="{FF2B5EF4-FFF2-40B4-BE49-F238E27FC236}">
-                <a16:creationId xmlns:a16="http://schemas.microsoft.com/office/drawing/2014/main" id="{8EB061C0-3B81-421F-8483-DC35408F3E4A}"/>
+                <a16:creationId xmlns:a16="http://schemas.microsoft.com/office/drawing/2014/main" id="{E493A8E1-B23C-4044-9497-09BD7A88D0CD}"/>
               </a:ext>
             </a:extLst>
           </p:cNvPr>
@@ -13395,7 +13403,7 @@
           <p:cNvPr id="8" name="">
             <a:extLst xmlns:a="http://schemas.openxmlformats.org/drawingml/2006/main">
               <a:ext uri="{FF2B5EF4-FFF2-40B4-BE49-F238E27FC236}">
-                <a16:creationId xmlns:a16="http://schemas.microsoft.com/office/drawing/2014/main" id="{5C930F80-FE38-4EF6-A6E0-0972C7F671D0}"/>
+                <a16:creationId xmlns:a16="http://schemas.microsoft.com/office/drawing/2014/main" id="{BCEE9510-8A06-4E9A-ACCD-8A4845C9E7B6}"/>
               </a:ext>
             </a:extLst>
           </p:cNvPr>
@@ -13452,7 +13460,7 @@
           <p:cNvPr id="9" name="">
             <a:extLst xmlns:a="http://schemas.openxmlformats.org/drawingml/2006/main">
               <a:ext uri="{FF2B5EF4-FFF2-40B4-BE49-F238E27FC236}">
-                <a16:creationId xmlns:a16="http://schemas.microsoft.com/office/drawing/2014/main" id="{361C494D-1E65-4879-9C7E-9473A96D4F3C}"/>
+                <a16:creationId xmlns:a16="http://schemas.microsoft.com/office/drawing/2014/main" id="{511B1EE6-6989-4BC5-A338-B0F6BF20B388}"/>
               </a:ext>
             </a:extLst>
           </p:cNvPr>
@@ -13509,7 +13517,7 @@
           <p:cNvPr id="10" name="">
             <a:extLst xmlns:a="http://schemas.openxmlformats.org/drawingml/2006/main">
               <a:ext uri="{FF2B5EF4-FFF2-40B4-BE49-F238E27FC236}">
-                <a16:creationId xmlns:a16="http://schemas.microsoft.com/office/drawing/2014/main" id="{7E66E736-4542-4972-BC55-BE2FBA98CA00}"/>
+                <a16:creationId xmlns:a16="http://schemas.microsoft.com/office/drawing/2014/main" id="{2403B8AB-8D4D-496A-A038-30EAF3094A48}"/>
               </a:ext>
             </a:extLst>
           </p:cNvPr>
@@ -13543,7 +13551,7 @@
           <p:cNvPr id="11" name="">
             <a:extLst xmlns:a="http://schemas.openxmlformats.org/drawingml/2006/main">
               <a:ext uri="{FF2B5EF4-FFF2-40B4-BE49-F238E27FC236}">
-                <a16:creationId xmlns:a16="http://schemas.microsoft.com/office/drawing/2014/main" id="{1FF5679A-828A-4A9F-97E7-96505A4FAC4D}"/>
+                <a16:creationId xmlns:a16="http://schemas.microsoft.com/office/drawing/2014/main" id="{FB90AFB5-FB8B-4D57-B28A-25312E1364A7}"/>
               </a:ext>
             </a:extLst>
           </p:cNvPr>
@@ -13575,7 +13583,7 @@
           <p:cNvPr id="12" name="">
             <a:extLst xmlns:a="http://schemas.openxmlformats.org/drawingml/2006/main">
               <a:ext uri="{FF2B5EF4-FFF2-40B4-BE49-F238E27FC236}">
-                <a16:creationId xmlns:a16="http://schemas.microsoft.com/office/drawing/2014/main" id="{40C182C4-1695-470D-8120-ABC517A21EC0}"/>
+                <a16:creationId xmlns:a16="http://schemas.microsoft.com/office/drawing/2014/main" id="{1D891B99-CB27-42D9-8A96-DF31519D4DFF}"/>
               </a:ext>
             </a:extLst>
           </p:cNvPr>
@@ -13632,7 +13640,7 @@
           <p:cNvPr id="13" name="">
             <a:extLst xmlns:a="http://schemas.openxmlformats.org/drawingml/2006/main">
               <a:ext uri="{FF2B5EF4-FFF2-40B4-BE49-F238E27FC236}">
-                <a16:creationId xmlns:a16="http://schemas.microsoft.com/office/drawing/2014/main" id="{6CFF56B5-C555-40AD-83BF-E263475103BA}"/>
+                <a16:creationId xmlns:a16="http://schemas.microsoft.com/office/drawing/2014/main" id="{69A41C41-E9B7-44CE-8702-0A72C9ACBDE5}"/>
               </a:ext>
             </a:extLst>
           </p:cNvPr>
@@ -13689,7 +13697,7 @@
           <p:cNvPr id="14" name="">
             <a:extLst xmlns:a="http://schemas.openxmlformats.org/drawingml/2006/main">
               <a:ext uri="{FF2B5EF4-FFF2-40B4-BE49-F238E27FC236}">
-                <a16:creationId xmlns:a16="http://schemas.microsoft.com/office/drawing/2014/main" id="{2AE9A8CE-9A69-491B-A1AD-D68E80F3FDD5}"/>
+                <a16:creationId xmlns:a16="http://schemas.microsoft.com/office/drawing/2014/main" id="{C7106AF0-879C-43AD-800E-F22C2957F492}"/>
               </a:ext>
             </a:extLst>
           </p:cNvPr>
@@ -13723,7 +13731,7 @@
           <p:cNvPr id="15" name="">
             <a:extLst xmlns:a="http://schemas.openxmlformats.org/drawingml/2006/main">
               <a:ext uri="{FF2B5EF4-FFF2-40B4-BE49-F238E27FC236}">
-                <a16:creationId xmlns:a16="http://schemas.microsoft.com/office/drawing/2014/main" id="{9B6ACC26-60AB-480D-A22D-9A99831663F2}"/>
+                <a16:creationId xmlns:a16="http://schemas.microsoft.com/office/drawing/2014/main" id="{3CC47F40-2E4E-4D45-B305-AEFBC9E15F38}"/>
               </a:ext>
             </a:extLst>
           </p:cNvPr>
@@ -13755,7 +13763,7 @@
           <p:cNvPr id="16" name="">
             <a:extLst xmlns:a="http://schemas.openxmlformats.org/drawingml/2006/main">
               <a:ext uri="{FF2B5EF4-FFF2-40B4-BE49-F238E27FC236}">
-                <a16:creationId xmlns:a16="http://schemas.microsoft.com/office/drawing/2014/main" id="{84060470-E27F-48FD-8E10-61AACF67B712}"/>
+                <a16:creationId xmlns:a16="http://schemas.microsoft.com/office/drawing/2014/main" id="{ADA4E61C-BA55-4A1A-B316-A7FD53DB5721}"/>
               </a:ext>
             </a:extLst>
           </p:cNvPr>
@@ -13812,7 +13820,7 @@
           <p:cNvPr id="17" name="">
             <a:extLst xmlns:a="http://schemas.openxmlformats.org/drawingml/2006/main">
               <a:ext uri="{FF2B5EF4-FFF2-40B4-BE49-F238E27FC236}">
-                <a16:creationId xmlns:a16="http://schemas.microsoft.com/office/drawing/2014/main" id="{6C88B2A7-C5E7-49F8-A94C-D5839C992D6D}"/>
+                <a16:creationId xmlns:a16="http://schemas.microsoft.com/office/drawing/2014/main" id="{3607A65D-DCE1-44C4-AF2E-8E6CB2A708A3}"/>
               </a:ext>
             </a:extLst>
           </p:cNvPr>
@@ -13869,7 +13877,7 @@
           <p:cNvPr id="18" name="">
             <a:extLst xmlns:a="http://schemas.openxmlformats.org/drawingml/2006/main">
               <a:ext uri="{FF2B5EF4-FFF2-40B4-BE49-F238E27FC236}">
-                <a16:creationId xmlns:a16="http://schemas.microsoft.com/office/drawing/2014/main" id="{346C8D50-FE5B-48CF-B222-8C316F21DC66}"/>
+                <a16:creationId xmlns:a16="http://schemas.microsoft.com/office/drawing/2014/main" id="{F3827469-7AE0-4AAE-8611-CC913ECC6BF6}"/>
               </a:ext>
             </a:extLst>
           </p:cNvPr>
@@ -13903,7 +13911,7 @@
           <p:cNvPr id="19" name="">
             <a:extLst xmlns:a="http://schemas.openxmlformats.org/drawingml/2006/main">
               <a:ext uri="{FF2B5EF4-FFF2-40B4-BE49-F238E27FC236}">
-                <a16:creationId xmlns:a16="http://schemas.microsoft.com/office/drawing/2014/main" id="{1A7AAD87-B6D7-4AFB-B260-040E320169FA}"/>
+                <a16:creationId xmlns:a16="http://schemas.microsoft.com/office/drawing/2014/main" id="{6B584268-0572-4C16-A1BF-A533386FAFB0}"/>
               </a:ext>
             </a:extLst>
           </p:cNvPr>
@@ -13935,7 +13943,7 @@
           <p:cNvPr id="20" name="">
             <a:extLst xmlns:a="http://schemas.openxmlformats.org/drawingml/2006/main">
               <a:ext uri="{FF2B5EF4-FFF2-40B4-BE49-F238E27FC236}">
-                <a16:creationId xmlns:a16="http://schemas.microsoft.com/office/drawing/2014/main" id="{E7A05BF2-0FAD-4AF3-AB96-501B74E4E86D}"/>
+                <a16:creationId xmlns:a16="http://schemas.microsoft.com/office/drawing/2014/main" id="{0F2A2B2D-E185-48BA-BB79-FC81250BFFFA}"/>
               </a:ext>
             </a:extLst>
           </p:cNvPr>
@@ -13992,7 +14000,7 @@
           <p:cNvPr id="21" name="">
             <a:extLst xmlns:a="http://schemas.openxmlformats.org/drawingml/2006/main">
               <a:ext uri="{FF2B5EF4-FFF2-40B4-BE49-F238E27FC236}">
-                <a16:creationId xmlns:a16="http://schemas.microsoft.com/office/drawing/2014/main" id="{83D5D451-5E58-4DD5-ADC4-C3B9DAE16077}"/>
+                <a16:creationId xmlns:a16="http://schemas.microsoft.com/office/drawing/2014/main" id="{91A018EE-740B-4D3C-8DFD-CC0F50468362}"/>
               </a:ext>
             </a:extLst>
           </p:cNvPr>
@@ -14047,7 +14055,7 @@
     </p:spTree>
     <p:extLst>
       <p:ext uri="{BB962C8B-B14F-4D97-AF65-F5344CB8AC3E}">
-        <p14:creationId xmlns:p14="http://schemas.microsoft.com/office/powerpoint/2010/main" val="472071971"/>
+        <p14:creationId xmlns:p14="http://schemas.microsoft.com/office/powerpoint/2010/main" val="99139775"/>
       </p:ext>
     </p:extLst>
   </p:cSld>
